--- a/mod1/template_esempio.pptx
+++ b/mod1/template_esempio.pptx
@@ -11,7 +11,6 @@
     <p:sldId id="259" r:id="rId10"/>
     <p:sldId id="260" r:id="rId11"/>
     <p:sldId id="261" r:id="rId12"/>
-    <p:sldId id="262" r:id="rId13"/>
   </p:sldIdLst>
   <p:sldSz cx="12191695" cy="6858000" type="screen4x3"/>
   <p:notesSz cx="6858000" cy="9144000"/>
@@ -3094,30 +3093,649 @@
         <p:nvPr/>
       </p:nvGrpSpPr>
       <p:grpSpPr/>
-      <p:pic>
-        <p:nvPicPr>
-          <p:cNvPr id="2" name="Picture 1" descr="cover.jpg"/>
-          <p:cNvPicPr>
-            <a:picLocks noChangeAspect="1"/>
-          </p:cNvPicPr>
-          <p:nvPr/>
-        </p:nvPicPr>
-        <p:blipFill>
-          <a:blip r:embed="rId2"/>
-          <a:stretch>
-            <a:fillRect/>
-          </a:stretch>
-        </p:blipFill>
-        <p:spPr>
-          <a:xfrm>
-            <a:off x="3310128" y="301752"/>
-            <a:ext cx="4965192" cy="6263640"/>
-          </a:xfrm>
-          <a:prstGeom prst="rect">
-            <a:avLst/>
-          </a:prstGeom>
-        </p:spPr>
-      </p:pic>
+      <p:sp>
+        <p:nvSpPr>
+          <p:cNvPr id="2" name="Rectangle 1"/>
+          <p:cNvSpPr/>
+          <p:nvPr/>
+        </p:nvSpPr>
+        <p:spPr>
+          <a:xfrm>
+            <a:off x="502920" y="384048"/>
+            <a:ext cx="1051560" cy="100584"/>
+          </a:xfrm>
+          <a:prstGeom prst="rect">
+            <a:avLst/>
+          </a:prstGeom>
+          <a:solidFill>
+            <a:srgbClr val="E86A17"/>
+          </a:solidFill>
+          <a:ln>
+            <a:noFill/>
+          </a:ln>
+        </p:spPr>
+        <p:style>
+          <a:lnRef idx="1">
+            <a:schemeClr val="accent1"/>
+          </a:lnRef>
+          <a:fillRef idx="3">
+            <a:schemeClr val="accent1"/>
+          </a:fillRef>
+          <a:effectRef idx="2">
+            <a:schemeClr val="accent1"/>
+          </a:effectRef>
+          <a:fontRef idx="minor">
+            <a:schemeClr val="lt1"/>
+          </a:fontRef>
+        </p:style>
+        <p:txBody>
+          <a:bodyPr rtlCol="0" anchor="ctr"/>
+          <a:lstStyle/>
+          <a:p>
+            <a:pPr algn="ctr"/>
+          </a:p>
+        </p:txBody>
+      </p:sp>
+      <p:sp>
+        <p:nvSpPr>
+          <p:cNvPr id="3" name="TextBox 2"/>
+          <p:cNvSpPr txBox="1"/>
+          <p:nvPr/>
+        </p:nvSpPr>
+        <p:spPr>
+          <a:xfrm>
+            <a:off x="502920" y="475488"/>
+            <a:ext cx="11201400" cy="731520"/>
+          </a:xfrm>
+          <a:prstGeom prst="rect">
+            <a:avLst/>
+          </a:prstGeom>
+          <a:noFill/>
+        </p:spPr>
+        <p:txBody>
+          <a:bodyPr wrap="square" anchor="t" lIns="0" rIns="0" tIns="0" bIns="0">
+            <a:spAutoFit/>
+          </a:bodyPr>
+          <a:lstStyle/>
+          <a:p>
+            <a:pPr algn="l"/>
+            <a:r>
+              <a:rPr sz="3000" b="1">
+                <a:solidFill>
+                  <a:srgbClr val="1A1A1A"/>
+                </a:solidFill>
+                <a:latin typeface="Calibri"/>
+              </a:rPr>
+              <a:t>LIVELLO GENERALE MATURITÀ</a:t>
+            </a:r>
+          </a:p>
+        </p:txBody>
+      </p:sp>
+      <p:sp>
+        <p:nvSpPr>
+          <p:cNvPr id="4" name="TextBox 3"/>
+          <p:cNvSpPr txBox="1"/>
+          <p:nvPr/>
+        </p:nvSpPr>
+        <p:spPr>
+          <a:xfrm>
+            <a:off x="502920" y="1600200"/>
+            <a:ext cx="4937760" cy="365760"/>
+          </a:xfrm>
+          <a:prstGeom prst="rect">
+            <a:avLst/>
+          </a:prstGeom>
+          <a:noFill/>
+        </p:spPr>
+        <p:txBody>
+          <a:bodyPr wrap="square" anchor="t" lIns="0" rIns="0" tIns="0" bIns="0">
+            <a:spAutoFit/>
+          </a:bodyPr>
+          <a:lstStyle/>
+          <a:p>
+            <a:pPr algn="l"/>
+            <a:r>
+              <a:rPr sz="1400" b="1">
+                <a:solidFill>
+                  <a:srgbClr val="555555"/>
+                </a:solidFill>
+                <a:latin typeface="Calibri"/>
+              </a:rPr>
+              <a:t>AREA</a:t>
+            </a:r>
+          </a:p>
+        </p:txBody>
+      </p:sp>
+      <p:sp>
+        <p:nvSpPr>
+          <p:cNvPr id="5" name="TextBox 4"/>
+          <p:cNvSpPr txBox="1"/>
+          <p:nvPr/>
+        </p:nvSpPr>
+        <p:spPr>
+          <a:xfrm>
+            <a:off x="5486400" y="1600200"/>
+            <a:ext cx="5486400" cy="365760"/>
+          </a:xfrm>
+          <a:prstGeom prst="rect">
+            <a:avLst/>
+          </a:prstGeom>
+          <a:noFill/>
+        </p:spPr>
+        <p:txBody>
+          <a:bodyPr wrap="square" anchor="t" lIns="0" rIns="0" tIns="0" bIns="0">
+            <a:spAutoFit/>
+          </a:bodyPr>
+          <a:lstStyle/>
+          <a:p>
+            <a:pPr algn="l"/>
+            <a:r>
+              <a:rPr sz="1400" b="1">
+                <a:solidFill>
+                  <a:srgbClr val="555555"/>
+                </a:solidFill>
+                <a:latin typeface="Calibri"/>
+              </a:rPr>
+              <a:t>RISULTATO</a:t>
+            </a:r>
+          </a:p>
+        </p:txBody>
+      </p:sp>
+      <p:sp>
+        <p:nvSpPr>
+          <p:cNvPr id="6" name="Rectangle 5"/>
+          <p:cNvSpPr/>
+          <p:nvPr/>
+        </p:nvSpPr>
+        <p:spPr>
+          <a:xfrm>
+            <a:off x="502920" y="2011680"/>
+            <a:ext cx="11201400" cy="9525"/>
+          </a:xfrm>
+          <a:prstGeom prst="rect">
+            <a:avLst/>
+          </a:prstGeom>
+          <a:solidFill>
+            <a:srgbClr val="CCCCCC"/>
+          </a:solidFill>
+          <a:ln>
+            <a:noFill/>
+          </a:ln>
+        </p:spPr>
+        <p:style>
+          <a:lnRef idx="1">
+            <a:schemeClr val="accent1"/>
+          </a:lnRef>
+          <a:fillRef idx="3">
+            <a:schemeClr val="accent1"/>
+          </a:fillRef>
+          <a:effectRef idx="2">
+            <a:schemeClr val="accent1"/>
+          </a:effectRef>
+          <a:fontRef idx="minor">
+            <a:schemeClr val="lt1"/>
+          </a:fontRef>
+        </p:style>
+        <p:txBody>
+          <a:bodyPr rtlCol="0" anchor="ctr"/>
+          <a:lstStyle/>
+          <a:p>
+            <a:pPr algn="ctr"/>
+          </a:p>
+        </p:txBody>
+      </p:sp>
+      <p:sp>
+        <p:nvSpPr>
+          <p:cNvPr id="7" name="TextBox 6"/>
+          <p:cNvSpPr txBox="1"/>
+          <p:nvPr/>
+        </p:nvSpPr>
+        <p:spPr>
+          <a:xfrm>
+            <a:off x="502920" y="2240280"/>
+            <a:ext cx="4937760" cy="822960"/>
+          </a:xfrm>
+          <a:prstGeom prst="rect">
+            <a:avLst/>
+          </a:prstGeom>
+          <a:noFill/>
+        </p:spPr>
+        <p:txBody>
+          <a:bodyPr wrap="square" anchor="t" lIns="0" rIns="0" tIns="0" bIns="0">
+            <a:spAutoFit/>
+          </a:bodyPr>
+          <a:lstStyle/>
+          <a:p>
+            <a:pPr algn="l"/>
+            <a:r>
+              <a:rPr sz="2000" b="1">
+                <a:solidFill>
+                  <a:srgbClr val="1A1A1A"/>
+                </a:solidFill>
+                <a:latin typeface="Calibri"/>
+              </a:rPr>
+              <a:t>STRATEGIA</a:t>
+            </a:r>
+          </a:p>
+        </p:txBody>
+      </p:sp>
+      <p:sp>
+        <p:nvSpPr>
+          <p:cNvPr id="8" name="TextBox 7"/>
+          <p:cNvSpPr txBox="1"/>
+          <p:nvPr/>
+        </p:nvSpPr>
+        <p:spPr>
+          <a:xfrm>
+            <a:off x="5486400" y="2240280"/>
+            <a:ext cx="5486400" cy="822960"/>
+          </a:xfrm>
+          <a:prstGeom prst="rect">
+            <a:avLst/>
+          </a:prstGeom>
+          <a:noFill/>
+        </p:spPr>
+        <p:txBody>
+          <a:bodyPr wrap="square" anchor="t" lIns="0" rIns="0" tIns="0" bIns="0">
+            <a:spAutoFit/>
+          </a:bodyPr>
+          <a:lstStyle/>
+          <a:p>
+            <a:pPr algn="l"/>
+            <a:r>
+              <a:rPr sz="2000" b="0">
+                <a:solidFill>
+                  <a:srgbClr val="555555"/>
+                </a:solidFill>
+                <a:latin typeface="Calibri"/>
+              </a:rPr>
+              <a:t>{{strategia.risultato}}</a:t>
+            </a:r>
+          </a:p>
+        </p:txBody>
+      </p:sp>
+      <p:sp>
+        <p:nvSpPr>
+          <p:cNvPr id="9" name="Rectangle 8"/>
+          <p:cNvSpPr/>
+          <p:nvPr/>
+        </p:nvSpPr>
+        <p:spPr>
+          <a:xfrm>
+            <a:off x="502920" y="3017520"/>
+            <a:ext cx="11201400" cy="9525"/>
+          </a:xfrm>
+          <a:prstGeom prst="rect">
+            <a:avLst/>
+          </a:prstGeom>
+          <a:solidFill>
+            <a:srgbClr val="CCCCCC"/>
+          </a:solidFill>
+          <a:ln>
+            <a:noFill/>
+          </a:ln>
+        </p:spPr>
+        <p:style>
+          <a:lnRef idx="1">
+            <a:schemeClr val="accent1"/>
+          </a:lnRef>
+          <a:fillRef idx="3">
+            <a:schemeClr val="accent1"/>
+          </a:fillRef>
+          <a:effectRef idx="2">
+            <a:schemeClr val="accent1"/>
+          </a:effectRef>
+          <a:fontRef idx="minor">
+            <a:schemeClr val="lt1"/>
+          </a:fontRef>
+        </p:style>
+        <p:txBody>
+          <a:bodyPr rtlCol="0" anchor="ctr"/>
+          <a:lstStyle/>
+          <a:p>
+            <a:pPr algn="ctr"/>
+          </a:p>
+        </p:txBody>
+      </p:sp>
+      <p:sp>
+        <p:nvSpPr>
+          <p:cNvPr id="10" name="TextBox 9"/>
+          <p:cNvSpPr txBox="1"/>
+          <p:nvPr/>
+        </p:nvSpPr>
+        <p:spPr>
+          <a:xfrm>
+            <a:off x="502920" y="3063240"/>
+            <a:ext cx="4937760" cy="822960"/>
+          </a:xfrm>
+          <a:prstGeom prst="rect">
+            <a:avLst/>
+          </a:prstGeom>
+          <a:noFill/>
+        </p:spPr>
+        <p:txBody>
+          <a:bodyPr wrap="square" anchor="t" lIns="0" rIns="0" tIns="0" bIns="0">
+            <a:spAutoFit/>
+          </a:bodyPr>
+          <a:lstStyle/>
+          <a:p>
+            <a:pPr algn="l"/>
+            <a:r>
+              <a:rPr sz="2000" b="1">
+                <a:solidFill>
+                  <a:srgbClr val="1A1A1A"/>
+                </a:solidFill>
+                <a:latin typeface="Calibri"/>
+              </a:rPr>
+              <a:t>CULTURA</a:t>
+            </a:r>
+          </a:p>
+        </p:txBody>
+      </p:sp>
+      <p:sp>
+        <p:nvSpPr>
+          <p:cNvPr id="11" name="TextBox 10"/>
+          <p:cNvSpPr txBox="1"/>
+          <p:nvPr/>
+        </p:nvSpPr>
+        <p:spPr>
+          <a:xfrm>
+            <a:off x="5486400" y="3063240"/>
+            <a:ext cx="5486400" cy="822960"/>
+          </a:xfrm>
+          <a:prstGeom prst="rect">
+            <a:avLst/>
+          </a:prstGeom>
+          <a:noFill/>
+        </p:spPr>
+        <p:txBody>
+          <a:bodyPr wrap="square" anchor="t" lIns="0" rIns="0" tIns="0" bIns="0">
+            <a:spAutoFit/>
+          </a:bodyPr>
+          <a:lstStyle/>
+          <a:p>
+            <a:pPr algn="l"/>
+            <a:r>
+              <a:rPr sz="2000" b="0">
+                <a:solidFill>
+                  <a:srgbClr val="555555"/>
+                </a:solidFill>
+                <a:latin typeface="Calibri"/>
+              </a:rPr>
+              <a:t>{{cultura.risultato}}</a:t>
+            </a:r>
+          </a:p>
+        </p:txBody>
+      </p:sp>
+      <p:sp>
+        <p:nvSpPr>
+          <p:cNvPr id="12" name="Rectangle 11"/>
+          <p:cNvSpPr/>
+          <p:nvPr/>
+        </p:nvSpPr>
+        <p:spPr>
+          <a:xfrm>
+            <a:off x="502920" y="3840480"/>
+            <a:ext cx="11201400" cy="9525"/>
+          </a:xfrm>
+          <a:prstGeom prst="rect">
+            <a:avLst/>
+          </a:prstGeom>
+          <a:solidFill>
+            <a:srgbClr val="CCCCCC"/>
+          </a:solidFill>
+          <a:ln>
+            <a:noFill/>
+          </a:ln>
+        </p:spPr>
+        <p:style>
+          <a:lnRef idx="1">
+            <a:schemeClr val="accent1"/>
+          </a:lnRef>
+          <a:fillRef idx="3">
+            <a:schemeClr val="accent1"/>
+          </a:fillRef>
+          <a:effectRef idx="2">
+            <a:schemeClr val="accent1"/>
+          </a:effectRef>
+          <a:fontRef idx="minor">
+            <a:schemeClr val="lt1"/>
+          </a:fontRef>
+        </p:style>
+        <p:txBody>
+          <a:bodyPr rtlCol="0" anchor="ctr"/>
+          <a:lstStyle/>
+          <a:p>
+            <a:pPr algn="ctr"/>
+          </a:p>
+        </p:txBody>
+      </p:sp>
+      <p:sp>
+        <p:nvSpPr>
+          <p:cNvPr id="13" name="TextBox 12"/>
+          <p:cNvSpPr txBox="1"/>
+          <p:nvPr/>
+        </p:nvSpPr>
+        <p:spPr>
+          <a:xfrm>
+            <a:off x="502920" y="3886200"/>
+            <a:ext cx="4937760" cy="822960"/>
+          </a:xfrm>
+          <a:prstGeom prst="rect">
+            <a:avLst/>
+          </a:prstGeom>
+          <a:noFill/>
+        </p:spPr>
+        <p:txBody>
+          <a:bodyPr wrap="square" anchor="t" lIns="0" rIns="0" tIns="0" bIns="0">
+            <a:spAutoFit/>
+          </a:bodyPr>
+          <a:lstStyle/>
+          <a:p>
+            <a:pPr algn="l"/>
+            <a:r>
+              <a:rPr sz="2000" b="1">
+                <a:solidFill>
+                  <a:srgbClr val="1A1A1A"/>
+                </a:solidFill>
+                <a:latin typeface="Calibri"/>
+              </a:rPr>
+              <a:t>PROCESSI</a:t>
+            </a:r>
+          </a:p>
+        </p:txBody>
+      </p:sp>
+      <p:sp>
+        <p:nvSpPr>
+          <p:cNvPr id="14" name="TextBox 13"/>
+          <p:cNvSpPr txBox="1"/>
+          <p:nvPr/>
+        </p:nvSpPr>
+        <p:spPr>
+          <a:xfrm>
+            <a:off x="5486400" y="3886200"/>
+            <a:ext cx="5486400" cy="822960"/>
+          </a:xfrm>
+          <a:prstGeom prst="rect">
+            <a:avLst/>
+          </a:prstGeom>
+          <a:noFill/>
+        </p:spPr>
+        <p:txBody>
+          <a:bodyPr wrap="square" anchor="t" lIns="0" rIns="0" tIns="0" bIns="0">
+            <a:spAutoFit/>
+          </a:bodyPr>
+          <a:lstStyle/>
+          <a:p>
+            <a:pPr algn="l"/>
+            <a:r>
+              <a:rPr sz="2000" b="0">
+                <a:solidFill>
+                  <a:srgbClr val="555555"/>
+                </a:solidFill>
+                <a:latin typeface="Calibri"/>
+              </a:rPr>
+              <a:t>{{processi.risultato}}</a:t>
+            </a:r>
+          </a:p>
+        </p:txBody>
+      </p:sp>
+      <p:sp>
+        <p:nvSpPr>
+          <p:cNvPr id="15" name="Rectangle 14"/>
+          <p:cNvSpPr/>
+          <p:nvPr/>
+        </p:nvSpPr>
+        <p:spPr>
+          <a:xfrm>
+            <a:off x="502920" y="4663440"/>
+            <a:ext cx="11201400" cy="9525"/>
+          </a:xfrm>
+          <a:prstGeom prst="rect">
+            <a:avLst/>
+          </a:prstGeom>
+          <a:solidFill>
+            <a:srgbClr val="CCCCCC"/>
+          </a:solidFill>
+          <a:ln>
+            <a:noFill/>
+          </a:ln>
+        </p:spPr>
+        <p:style>
+          <a:lnRef idx="1">
+            <a:schemeClr val="accent1"/>
+          </a:lnRef>
+          <a:fillRef idx="3">
+            <a:schemeClr val="accent1"/>
+          </a:fillRef>
+          <a:effectRef idx="2">
+            <a:schemeClr val="accent1"/>
+          </a:effectRef>
+          <a:fontRef idx="minor">
+            <a:schemeClr val="lt1"/>
+          </a:fontRef>
+        </p:style>
+        <p:txBody>
+          <a:bodyPr rtlCol="0" anchor="ctr"/>
+          <a:lstStyle/>
+          <a:p>
+            <a:pPr algn="ctr"/>
+          </a:p>
+        </p:txBody>
+      </p:sp>
+      <p:sp>
+        <p:nvSpPr>
+          <p:cNvPr id="16" name="TextBox 15"/>
+          <p:cNvSpPr txBox="1"/>
+          <p:nvPr/>
+        </p:nvSpPr>
+        <p:spPr>
+          <a:xfrm>
+            <a:off x="502920" y="4709160"/>
+            <a:ext cx="4937760" cy="822960"/>
+          </a:xfrm>
+          <a:prstGeom prst="rect">
+            <a:avLst/>
+          </a:prstGeom>
+          <a:noFill/>
+        </p:spPr>
+        <p:txBody>
+          <a:bodyPr wrap="square" anchor="t" lIns="0" rIns="0" tIns="0" bIns="0">
+            <a:spAutoFit/>
+          </a:bodyPr>
+          <a:lstStyle/>
+          <a:p>
+            <a:pPr algn="l"/>
+            <a:r>
+              <a:rPr sz="2000" b="1">
+                <a:solidFill>
+                  <a:srgbClr val="1A1A1A"/>
+                </a:solidFill>
+                <a:latin typeface="Calibri"/>
+              </a:rPr>
+              <a:t>MERCATO</a:t>
+            </a:r>
+          </a:p>
+        </p:txBody>
+      </p:sp>
+      <p:sp>
+        <p:nvSpPr>
+          <p:cNvPr id="17" name="TextBox 16"/>
+          <p:cNvSpPr txBox="1"/>
+          <p:nvPr/>
+        </p:nvSpPr>
+        <p:spPr>
+          <a:xfrm>
+            <a:off x="5486400" y="4709160"/>
+            <a:ext cx="5486400" cy="822960"/>
+          </a:xfrm>
+          <a:prstGeom prst="rect">
+            <a:avLst/>
+          </a:prstGeom>
+          <a:noFill/>
+        </p:spPr>
+        <p:txBody>
+          <a:bodyPr wrap="square" anchor="t" lIns="0" rIns="0" tIns="0" bIns="0">
+            <a:spAutoFit/>
+          </a:bodyPr>
+          <a:lstStyle/>
+          <a:p>
+            <a:pPr algn="l"/>
+            <a:r>
+              <a:rPr sz="2000" b="0">
+                <a:solidFill>
+                  <a:srgbClr val="555555"/>
+                </a:solidFill>
+                <a:latin typeface="Calibri"/>
+              </a:rPr>
+              <a:t>{{mercato.risultato}}</a:t>
+            </a:r>
+          </a:p>
+        </p:txBody>
+      </p:sp>
+      <p:sp>
+        <p:nvSpPr>
+          <p:cNvPr id="18" name="Rectangle 17"/>
+          <p:cNvSpPr/>
+          <p:nvPr/>
+        </p:nvSpPr>
+        <p:spPr>
+          <a:xfrm>
+            <a:off x="502920" y="5486400"/>
+            <a:ext cx="11201400" cy="9525"/>
+          </a:xfrm>
+          <a:prstGeom prst="rect">
+            <a:avLst/>
+          </a:prstGeom>
+          <a:solidFill>
+            <a:srgbClr val="CCCCCC"/>
+          </a:solidFill>
+          <a:ln>
+            <a:noFill/>
+          </a:ln>
+        </p:spPr>
+        <p:style>
+          <a:lnRef idx="1">
+            <a:schemeClr val="accent1"/>
+          </a:lnRef>
+          <a:fillRef idx="3">
+            <a:schemeClr val="accent1"/>
+          </a:fillRef>
+          <a:effectRef idx="2">
+            <a:schemeClr val="accent1"/>
+          </a:effectRef>
+          <a:fontRef idx="minor">
+            <a:schemeClr val="lt1"/>
+          </a:fontRef>
+        </p:style>
+        <p:txBody>
+          <a:bodyPr rtlCol="0" anchor="ctr"/>
+          <a:lstStyle/>
+          <a:p>
+            <a:pPr algn="ctr"/>
+          </a:p>
+        </p:txBody>
+      </p:sp>
     </p:spTree>
   </p:cSld>
   <p:clrMapOvr>
@@ -3188,7 +3806,7 @@
         <p:spPr>
           <a:xfrm>
             <a:off x="502920" y="475488"/>
-            <a:ext cx="11201400" cy="731520"/>
+            <a:ext cx="8229600" cy="731520"/>
           </a:xfrm>
           <a:prstGeom prst="rect">
             <a:avLst/>
@@ -3209,7 +3827,7 @@
                 </a:solidFill>
                 <a:latin typeface="Calibri"/>
               </a:rPr>
-              <a:t>LIVELLO GENERALE MATURITÀ</a:t>
+              <a:t>STRATEGIA</a:t>
             </a:r>
           </a:p>
         </p:txBody>
@@ -3222,63 +3840,203 @@
         </p:nvSpPr>
         <p:spPr>
           <a:xfrm>
-            <a:off x="502920" y="1600200"/>
-            <a:ext cx="4937760" cy="365760"/>
-          </a:xfrm>
-          <a:prstGeom prst="rect">
-            <a:avLst/>
-          </a:prstGeom>
-          <a:noFill/>
-        </p:spPr>
-        <p:txBody>
-          <a:bodyPr wrap="square" anchor="t" lIns="0" rIns="0" tIns="0" bIns="0">
-            <a:spAutoFit/>
-          </a:bodyPr>
-          <a:lstStyle/>
-          <a:p>
-            <a:pPr algn="l"/>
-            <a:r>
-              <a:rPr sz="1400" b="1">
+            <a:off x="502920" y="1508760"/>
+            <a:ext cx="2103120" cy="320040"/>
+          </a:xfrm>
+          <a:prstGeom prst="rect">
+            <a:avLst/>
+          </a:prstGeom>
+          <a:noFill/>
+        </p:spPr>
+        <p:txBody>
+          <a:bodyPr wrap="square" anchor="t" lIns="0" rIns="0" tIns="0" bIns="0">
+            <a:spAutoFit/>
+          </a:bodyPr>
+          <a:lstStyle/>
+          <a:p>
+            <a:pPr algn="l"/>
+            <a:r>
+              <a:rPr sz="1300" b="1">
+                <a:solidFill>
+                  <a:srgbClr val="1A1A1A"/>
+                </a:solidFill>
+                <a:latin typeface="Calibri"/>
+              </a:rPr>
+              <a:t>RISULTATO</a:t>
+            </a:r>
+          </a:p>
+        </p:txBody>
+      </p:sp>
+      <p:sp>
+        <p:nvSpPr>
+          <p:cNvPr id="5" name="TextBox 4"/>
+          <p:cNvSpPr txBox="1"/>
+          <p:nvPr/>
+        </p:nvSpPr>
+        <p:spPr>
+          <a:xfrm>
+            <a:off x="502920" y="1847088"/>
+            <a:ext cx="2103120" cy="365760"/>
+          </a:xfrm>
+          <a:prstGeom prst="rect">
+            <a:avLst/>
+          </a:prstGeom>
+          <a:noFill/>
+        </p:spPr>
+        <p:txBody>
+          <a:bodyPr wrap="square" anchor="t" lIns="0" rIns="0" tIns="0" bIns="0">
+            <a:spAutoFit/>
+          </a:bodyPr>
+          <a:lstStyle/>
+          <a:p>
+            <a:pPr algn="l"/>
+            <a:r>
+              <a:rPr sz="1400" b="0">
                 <a:solidFill>
                   <a:srgbClr val="555555"/>
                 </a:solidFill>
                 <a:latin typeface="Calibri"/>
               </a:rPr>
-              <a:t>AREA</a:t>
-            </a:r>
-          </a:p>
-        </p:txBody>
-      </p:sp>
-      <p:sp>
-        <p:nvSpPr>
-          <p:cNvPr id="5" name="TextBox 4"/>
-          <p:cNvSpPr txBox="1"/>
-          <p:nvPr/>
-        </p:nvSpPr>
-        <p:spPr>
-          <a:xfrm>
-            <a:off x="5486400" y="1600200"/>
-            <a:ext cx="5486400" cy="365760"/>
-          </a:xfrm>
-          <a:prstGeom prst="rect">
-            <a:avLst/>
-          </a:prstGeom>
-          <a:noFill/>
-        </p:spPr>
-        <p:txBody>
-          <a:bodyPr wrap="square" anchor="t" lIns="0" rIns="0" tIns="0" bIns="0">
-            <a:spAutoFit/>
-          </a:bodyPr>
-          <a:lstStyle/>
-          <a:p>
-            <a:pPr algn="l"/>
-            <a:r>
-              <a:rPr sz="1400" b="1">
+              <a:t>{{strategia.risultato}}</a:t>
+            </a:r>
+          </a:p>
+        </p:txBody>
+      </p:sp>
+      <p:sp>
+        <p:nvSpPr>
+          <p:cNvPr id="6" name="TextBox 5"/>
+          <p:cNvSpPr txBox="1"/>
+          <p:nvPr/>
+        </p:nvSpPr>
+        <p:spPr>
+          <a:xfrm>
+            <a:off x="2834640" y="1508760"/>
+            <a:ext cx="8778240" cy="320040"/>
+          </a:xfrm>
+          <a:prstGeom prst="rect">
+            <a:avLst/>
+          </a:prstGeom>
+          <a:noFill/>
+        </p:spPr>
+        <p:txBody>
+          <a:bodyPr wrap="square" anchor="t" lIns="0" rIns="0" tIns="0" bIns="0">
+            <a:spAutoFit/>
+          </a:bodyPr>
+          <a:lstStyle/>
+          <a:p>
+            <a:pPr algn="l"/>
+            <a:r>
+              <a:rPr sz="1300" b="1">
+                <a:solidFill>
+                  <a:srgbClr val="1A1A1A"/>
+                </a:solidFill>
+                <a:latin typeface="Calibri"/>
+              </a:rPr>
+              <a:t>COMMENTO</a:t>
+            </a:r>
+          </a:p>
+        </p:txBody>
+      </p:sp>
+      <p:sp>
+        <p:nvSpPr>
+          <p:cNvPr id="7" name="TextBox 6"/>
+          <p:cNvSpPr txBox="1"/>
+          <p:nvPr/>
+        </p:nvSpPr>
+        <p:spPr>
+          <a:xfrm>
+            <a:off x="2834640" y="1847088"/>
+            <a:ext cx="8869680" cy="1554480"/>
+          </a:xfrm>
+          <a:prstGeom prst="rect">
+            <a:avLst/>
+          </a:prstGeom>
+          <a:noFill/>
+        </p:spPr>
+        <p:txBody>
+          <a:bodyPr wrap="square" anchor="t" lIns="0" rIns="0" tIns="0" bIns="0">
+            <a:spAutoFit/>
+          </a:bodyPr>
+          <a:lstStyle/>
+          <a:p>
+            <a:pPr algn="l"/>
+            <a:r>
+              <a:rPr sz="1050" b="0">
                 <a:solidFill>
                   <a:srgbClr val="555555"/>
                 </a:solidFill>
                 <a:latin typeface="Calibri"/>
               </a:rPr>
+              <a:t>{{strategia.commento}}</a:t>
+            </a:r>
+          </a:p>
+        </p:txBody>
+      </p:sp>
+      <p:sp>
+        <p:nvSpPr>
+          <p:cNvPr id="8" name="TextBox 7"/>
+          <p:cNvSpPr txBox="1"/>
+          <p:nvPr/>
+        </p:nvSpPr>
+        <p:spPr>
+          <a:xfrm>
+            <a:off x="502920" y="3611880"/>
+            <a:ext cx="3108960" cy="320040"/>
+          </a:xfrm>
+          <a:prstGeom prst="rect">
+            <a:avLst/>
+          </a:prstGeom>
+          <a:noFill/>
+        </p:spPr>
+        <p:txBody>
+          <a:bodyPr wrap="square" anchor="t" lIns="0" rIns="0" tIns="0" bIns="0">
+            <a:spAutoFit/>
+          </a:bodyPr>
+          <a:lstStyle/>
+          <a:p>
+            <a:pPr algn="l"/>
+            <a:r>
+              <a:rPr sz="1300" b="1">
+                <a:solidFill>
+                  <a:srgbClr val="1A1A1A"/>
+                </a:solidFill>
+                <a:latin typeface="Calibri"/>
+              </a:rPr>
+              <a:t>SOTTOGRUPPO</a:t>
+            </a:r>
+          </a:p>
+        </p:txBody>
+      </p:sp>
+      <p:sp>
+        <p:nvSpPr>
+          <p:cNvPr id="9" name="TextBox 8"/>
+          <p:cNvSpPr txBox="1"/>
+          <p:nvPr/>
+        </p:nvSpPr>
+        <p:spPr>
+          <a:xfrm>
+            <a:off x="3794760" y="3611880"/>
+            <a:ext cx="2011680" cy="320040"/>
+          </a:xfrm>
+          <a:prstGeom prst="rect">
+            <a:avLst/>
+          </a:prstGeom>
+          <a:noFill/>
+        </p:spPr>
+        <p:txBody>
+          <a:bodyPr wrap="square" anchor="t" lIns="0" rIns="0" tIns="0" bIns="0">
+            <a:spAutoFit/>
+          </a:bodyPr>
+          <a:lstStyle/>
+          <a:p>
+            <a:pPr algn="l"/>
+            <a:r>
+              <a:rPr sz="1300" b="1">
+                <a:solidFill>
+                  <a:srgbClr val="1A1A1A"/>
+                </a:solidFill>
+                <a:latin typeface="Calibri"/>
+              </a:rPr>
               <a:t>RISULTATO</a:t>
             </a:r>
           </a:p>
@@ -3286,13 +4044,153 @@
       </p:sp>
       <p:sp>
         <p:nvSpPr>
-          <p:cNvPr id="6" name="Rectangle 5"/>
+          <p:cNvPr id="10" name="TextBox 9"/>
+          <p:cNvSpPr txBox="1"/>
+          <p:nvPr/>
+        </p:nvSpPr>
+        <p:spPr>
+          <a:xfrm>
+            <a:off x="5989320" y="3611880"/>
+            <a:ext cx="5669280" cy="320040"/>
+          </a:xfrm>
+          <a:prstGeom prst="rect">
+            <a:avLst/>
+          </a:prstGeom>
+          <a:noFill/>
+        </p:spPr>
+        <p:txBody>
+          <a:bodyPr wrap="square" anchor="t" lIns="0" rIns="0" tIns="0" bIns="0">
+            <a:spAutoFit/>
+          </a:bodyPr>
+          <a:lstStyle/>
+          <a:p>
+            <a:pPr algn="l"/>
+            <a:r>
+              <a:rPr sz="1300" b="1">
+                <a:solidFill>
+                  <a:srgbClr val="1A1A1A"/>
+                </a:solidFill>
+                <a:latin typeface="Calibri"/>
+              </a:rPr>
+              <a:t>ATTIVITÀ SUGGERITE</a:t>
+            </a:r>
+          </a:p>
+        </p:txBody>
+      </p:sp>
+      <p:sp>
+        <p:nvSpPr>
+          <p:cNvPr id="11" name="TextBox 10"/>
+          <p:cNvSpPr txBox="1"/>
+          <p:nvPr/>
+        </p:nvSpPr>
+        <p:spPr>
+          <a:xfrm>
+            <a:off x="502920" y="4023360"/>
+            <a:ext cx="3154680" cy="932688"/>
+          </a:xfrm>
+          <a:prstGeom prst="rect">
+            <a:avLst/>
+          </a:prstGeom>
+          <a:noFill/>
+        </p:spPr>
+        <p:txBody>
+          <a:bodyPr wrap="square" anchor="t" lIns="0" rIns="0" tIns="0" bIns="0">
+            <a:spAutoFit/>
+          </a:bodyPr>
+          <a:lstStyle/>
+          <a:p>
+            <a:pPr algn="l"/>
+            <a:r>
+              <a:rPr sz="1200" b="0">
+                <a:solidFill>
+                  <a:srgbClr val="1A1A1A"/>
+                </a:solidFill>
+                <a:latin typeface="Calibri"/>
+              </a:rPr>
+              <a:t>Strategia e Pianificazione</a:t>
+            </a:r>
+          </a:p>
+        </p:txBody>
+      </p:sp>
+      <p:sp>
+        <p:nvSpPr>
+          <p:cNvPr id="12" name="TextBox 11"/>
+          <p:cNvSpPr txBox="1"/>
+          <p:nvPr/>
+        </p:nvSpPr>
+        <p:spPr>
+          <a:xfrm>
+            <a:off x="3794760" y="4023360"/>
+            <a:ext cx="2011680" cy="932688"/>
+          </a:xfrm>
+          <a:prstGeom prst="rect">
+            <a:avLst/>
+          </a:prstGeom>
+          <a:noFill/>
+        </p:spPr>
+        <p:txBody>
+          <a:bodyPr wrap="square" anchor="t" lIns="0" rIns="0" tIns="0" bIns="0">
+            <a:spAutoFit/>
+          </a:bodyPr>
+          <a:lstStyle/>
+          <a:p>
+            <a:pPr algn="l"/>
+            <a:r>
+              <a:rPr sz="1200" b="0">
+                <a:solidFill>
+                  <a:srgbClr val="555555"/>
+                </a:solidFill>
+                <a:latin typeface="Calibri"/>
+              </a:rPr>
+              <a:t>{{strategia_pianificazione.risultato}}</a:t>
+            </a:r>
+          </a:p>
+        </p:txBody>
+      </p:sp>
+      <p:sp>
+        <p:nvSpPr>
+          <p:cNvPr id="13" name="TextBox 12"/>
+          <p:cNvSpPr txBox="1"/>
+          <p:nvPr/>
+        </p:nvSpPr>
+        <p:spPr>
+          <a:xfrm>
+            <a:off x="5989320" y="4023360"/>
+            <a:ext cx="5715000" cy="932688"/>
+          </a:xfrm>
+          <a:prstGeom prst="rect">
+            <a:avLst/>
+          </a:prstGeom>
+          <a:noFill/>
+        </p:spPr>
+        <p:txBody>
+          <a:bodyPr wrap="square" anchor="t" lIns="0" rIns="0" tIns="0" bIns="0">
+            <a:spAutoFit/>
+          </a:bodyPr>
+          <a:lstStyle/>
+          <a:p>
+            <a:pPr algn="l"/>
+            <a:r>
+              <a:rPr sz="950" b="0">
+                <a:solidFill>
+                  <a:srgbClr val="555555"/>
+                </a:solidFill>
+                <a:latin typeface="Calibri"/>
+              </a:rPr>
+              <a:t>{{strategia_pianificazione.attivita}}</a:t>
+            </a:r>
+          </a:p>
+        </p:txBody>
+      </p:sp>
+      <p:sp>
+        <p:nvSpPr>
+          <p:cNvPr id="14" name="Rectangle 13"/>
           <p:cNvSpPr/>
           <p:nvPr/>
         </p:nvSpPr>
         <p:spPr>
           <a:xfrm>
-            <a:off x="502920" y="2011680"/>
+            <a:off x="502920" y="4919472"/>
             <a:ext cx="11201400" cy="9525"/>
           </a:xfrm>
           <a:prstGeom prst="rect">
@@ -3329,83 +4227,118 @@
       </p:sp>
       <p:sp>
         <p:nvSpPr>
-          <p:cNvPr id="7" name="TextBox 6"/>
-          <p:cNvSpPr txBox="1"/>
-          <p:nvPr/>
-        </p:nvSpPr>
-        <p:spPr>
-          <a:xfrm>
-            <a:off x="502920" y="2240280"/>
-            <a:ext cx="4937760" cy="822960"/>
-          </a:xfrm>
-          <a:prstGeom prst="rect">
-            <a:avLst/>
-          </a:prstGeom>
-          <a:noFill/>
-        </p:spPr>
-        <p:txBody>
-          <a:bodyPr wrap="square" anchor="t" lIns="0" rIns="0" tIns="0" bIns="0">
-            <a:spAutoFit/>
-          </a:bodyPr>
-          <a:lstStyle/>
-          <a:p>
-            <a:pPr algn="l"/>
-            <a:r>
-              <a:rPr sz="2000" b="1">
+          <p:cNvPr id="15" name="TextBox 14"/>
+          <p:cNvSpPr txBox="1"/>
+          <p:nvPr/>
+        </p:nvSpPr>
+        <p:spPr>
+          <a:xfrm>
+            <a:off x="502920" y="4974336"/>
+            <a:ext cx="3154680" cy="932688"/>
+          </a:xfrm>
+          <a:prstGeom prst="rect">
+            <a:avLst/>
+          </a:prstGeom>
+          <a:noFill/>
+        </p:spPr>
+        <p:txBody>
+          <a:bodyPr wrap="square" anchor="t" lIns="0" rIns="0" tIns="0" bIns="0">
+            <a:spAutoFit/>
+          </a:bodyPr>
+          <a:lstStyle/>
+          <a:p>
+            <a:pPr algn="l"/>
+            <a:r>
+              <a:rPr sz="1200" b="0">
                 <a:solidFill>
                   <a:srgbClr val="1A1A1A"/>
                 </a:solidFill>
                 <a:latin typeface="Calibri"/>
               </a:rPr>
-              <a:t>STRATEGIA</a:t>
-            </a:r>
-          </a:p>
-        </p:txBody>
-      </p:sp>
-      <p:sp>
-        <p:nvSpPr>
-          <p:cNvPr id="8" name="TextBox 7"/>
-          <p:cNvSpPr txBox="1"/>
-          <p:nvPr/>
-        </p:nvSpPr>
-        <p:spPr>
-          <a:xfrm>
-            <a:off x="5486400" y="2240280"/>
-            <a:ext cx="5486400" cy="822960"/>
-          </a:xfrm>
-          <a:prstGeom prst="rect">
-            <a:avLst/>
-          </a:prstGeom>
-          <a:noFill/>
-        </p:spPr>
-        <p:txBody>
-          <a:bodyPr wrap="square" anchor="t" lIns="0" rIns="0" tIns="0" bIns="0">
-            <a:spAutoFit/>
-          </a:bodyPr>
-          <a:lstStyle/>
-          <a:p>
-            <a:pPr algn="l"/>
-            <a:r>
-              <a:rPr sz="2000" b="0">
+              <a:t>Governance e Leadership</a:t>
+            </a:r>
+          </a:p>
+        </p:txBody>
+      </p:sp>
+      <p:sp>
+        <p:nvSpPr>
+          <p:cNvPr id="16" name="TextBox 15"/>
+          <p:cNvSpPr txBox="1"/>
+          <p:nvPr/>
+        </p:nvSpPr>
+        <p:spPr>
+          <a:xfrm>
+            <a:off x="3794760" y="4974336"/>
+            <a:ext cx="2011680" cy="932688"/>
+          </a:xfrm>
+          <a:prstGeom prst="rect">
+            <a:avLst/>
+          </a:prstGeom>
+          <a:noFill/>
+        </p:spPr>
+        <p:txBody>
+          <a:bodyPr wrap="square" anchor="t" lIns="0" rIns="0" tIns="0" bIns="0">
+            <a:spAutoFit/>
+          </a:bodyPr>
+          <a:lstStyle/>
+          <a:p>
+            <a:pPr algn="l"/>
+            <a:r>
+              <a:rPr sz="1200" b="0">
                 <a:solidFill>
                   <a:srgbClr val="555555"/>
                 </a:solidFill>
                 <a:latin typeface="Calibri"/>
               </a:rPr>
-              <a:t>{{strategia.risultato}}</a:t>
-            </a:r>
-          </a:p>
-        </p:txBody>
-      </p:sp>
-      <p:sp>
-        <p:nvSpPr>
-          <p:cNvPr id="9" name="Rectangle 8"/>
+              <a:t>{{governance_leadership.risultato}}</a:t>
+            </a:r>
+          </a:p>
+        </p:txBody>
+      </p:sp>
+      <p:sp>
+        <p:nvSpPr>
+          <p:cNvPr id="17" name="TextBox 16"/>
+          <p:cNvSpPr txBox="1"/>
+          <p:nvPr/>
+        </p:nvSpPr>
+        <p:spPr>
+          <a:xfrm>
+            <a:off x="5989320" y="4974336"/>
+            <a:ext cx="5715000" cy="932688"/>
+          </a:xfrm>
+          <a:prstGeom prst="rect">
+            <a:avLst/>
+          </a:prstGeom>
+          <a:noFill/>
+        </p:spPr>
+        <p:txBody>
+          <a:bodyPr wrap="square" anchor="t" lIns="0" rIns="0" tIns="0" bIns="0">
+            <a:spAutoFit/>
+          </a:bodyPr>
+          <a:lstStyle/>
+          <a:p>
+            <a:pPr algn="l"/>
+            <a:r>
+              <a:rPr sz="950" b="0">
+                <a:solidFill>
+                  <a:srgbClr val="555555"/>
+                </a:solidFill>
+                <a:latin typeface="Calibri"/>
+              </a:rPr>
+              <a:t>{{governance_leadership.attivita}}</a:t>
+            </a:r>
+          </a:p>
+        </p:txBody>
+      </p:sp>
+      <p:sp>
+        <p:nvSpPr>
+          <p:cNvPr id="18" name="Rectangle 17"/>
           <p:cNvSpPr/>
           <p:nvPr/>
         </p:nvSpPr>
         <p:spPr>
           <a:xfrm>
-            <a:off x="502920" y="3017520"/>
+            <a:off x="502920" y="5870448"/>
             <a:ext cx="11201400" cy="9525"/>
           </a:xfrm>
           <a:prstGeom prst="rect">
@@ -3442,309 +4375,118 @@
       </p:sp>
       <p:sp>
         <p:nvSpPr>
-          <p:cNvPr id="10" name="TextBox 9"/>
-          <p:cNvSpPr txBox="1"/>
-          <p:nvPr/>
-        </p:nvSpPr>
-        <p:spPr>
-          <a:xfrm>
-            <a:off x="502920" y="3063240"/>
-            <a:ext cx="4937760" cy="822960"/>
-          </a:xfrm>
-          <a:prstGeom prst="rect">
-            <a:avLst/>
-          </a:prstGeom>
-          <a:noFill/>
-        </p:spPr>
-        <p:txBody>
-          <a:bodyPr wrap="square" anchor="t" lIns="0" rIns="0" tIns="0" bIns="0">
-            <a:spAutoFit/>
-          </a:bodyPr>
-          <a:lstStyle/>
-          <a:p>
-            <a:pPr algn="l"/>
-            <a:r>
-              <a:rPr sz="2000" b="1">
+          <p:cNvPr id="19" name="TextBox 18"/>
+          <p:cNvSpPr txBox="1"/>
+          <p:nvPr/>
+        </p:nvSpPr>
+        <p:spPr>
+          <a:xfrm>
+            <a:off x="502920" y="5925312"/>
+            <a:ext cx="3154680" cy="932688"/>
+          </a:xfrm>
+          <a:prstGeom prst="rect">
+            <a:avLst/>
+          </a:prstGeom>
+          <a:noFill/>
+        </p:spPr>
+        <p:txBody>
+          <a:bodyPr wrap="square" anchor="t" lIns="0" rIns="0" tIns="0" bIns="0">
+            <a:spAutoFit/>
+          </a:bodyPr>
+          <a:lstStyle/>
+          <a:p>
+            <a:pPr algn="l"/>
+            <a:r>
+              <a:rPr sz="1200" b="0">
                 <a:solidFill>
                   <a:srgbClr val="1A1A1A"/>
                 </a:solidFill>
                 <a:latin typeface="Calibri"/>
               </a:rPr>
-              <a:t>CULTURA</a:t>
-            </a:r>
-          </a:p>
-        </p:txBody>
-      </p:sp>
-      <p:sp>
-        <p:nvSpPr>
-          <p:cNvPr id="11" name="TextBox 10"/>
-          <p:cNvSpPr txBox="1"/>
-          <p:nvPr/>
-        </p:nvSpPr>
-        <p:spPr>
-          <a:xfrm>
-            <a:off x="5486400" y="3063240"/>
-            <a:ext cx="5486400" cy="822960"/>
-          </a:xfrm>
-          <a:prstGeom prst="rect">
-            <a:avLst/>
-          </a:prstGeom>
-          <a:noFill/>
-        </p:spPr>
-        <p:txBody>
-          <a:bodyPr wrap="square" anchor="t" lIns="0" rIns="0" tIns="0" bIns="0">
-            <a:spAutoFit/>
-          </a:bodyPr>
-          <a:lstStyle/>
-          <a:p>
-            <a:pPr algn="l"/>
-            <a:r>
-              <a:rPr sz="2000" b="0">
+              <a:t>Misurazione e Impatto</a:t>
+            </a:r>
+          </a:p>
+        </p:txBody>
+      </p:sp>
+      <p:sp>
+        <p:nvSpPr>
+          <p:cNvPr id="20" name="TextBox 19"/>
+          <p:cNvSpPr txBox="1"/>
+          <p:nvPr/>
+        </p:nvSpPr>
+        <p:spPr>
+          <a:xfrm>
+            <a:off x="3794760" y="5925312"/>
+            <a:ext cx="2011680" cy="932688"/>
+          </a:xfrm>
+          <a:prstGeom prst="rect">
+            <a:avLst/>
+          </a:prstGeom>
+          <a:noFill/>
+        </p:spPr>
+        <p:txBody>
+          <a:bodyPr wrap="square" anchor="t" lIns="0" rIns="0" tIns="0" bIns="0">
+            <a:spAutoFit/>
+          </a:bodyPr>
+          <a:lstStyle/>
+          <a:p>
+            <a:pPr algn="l"/>
+            <a:r>
+              <a:rPr sz="1200" b="0">
                 <a:solidFill>
                   <a:srgbClr val="555555"/>
                 </a:solidFill>
                 <a:latin typeface="Calibri"/>
               </a:rPr>
-              <a:t>{{cultura.risultato}}</a:t>
-            </a:r>
-          </a:p>
-        </p:txBody>
-      </p:sp>
-      <p:sp>
-        <p:nvSpPr>
-          <p:cNvPr id="12" name="Rectangle 11"/>
+              <a:t>{{misurazione_impatto.risultato}}</a:t>
+            </a:r>
+          </a:p>
+        </p:txBody>
+      </p:sp>
+      <p:sp>
+        <p:nvSpPr>
+          <p:cNvPr id="21" name="TextBox 20"/>
+          <p:cNvSpPr txBox="1"/>
+          <p:nvPr/>
+        </p:nvSpPr>
+        <p:spPr>
+          <a:xfrm>
+            <a:off x="5989320" y="5925312"/>
+            <a:ext cx="5715000" cy="932688"/>
+          </a:xfrm>
+          <a:prstGeom prst="rect">
+            <a:avLst/>
+          </a:prstGeom>
+          <a:noFill/>
+        </p:spPr>
+        <p:txBody>
+          <a:bodyPr wrap="square" anchor="t" lIns="0" rIns="0" tIns="0" bIns="0">
+            <a:spAutoFit/>
+          </a:bodyPr>
+          <a:lstStyle/>
+          <a:p>
+            <a:pPr algn="l"/>
+            <a:r>
+              <a:rPr sz="950" b="0">
+                <a:solidFill>
+                  <a:srgbClr val="555555"/>
+                </a:solidFill>
+                <a:latin typeface="Calibri"/>
+              </a:rPr>
+              <a:t>{{misurazione_impatto.attivita}}</a:t>
+            </a:r>
+          </a:p>
+        </p:txBody>
+      </p:sp>
+      <p:sp>
+        <p:nvSpPr>
+          <p:cNvPr id="22" name="Rectangle 21"/>
           <p:cNvSpPr/>
           <p:nvPr/>
         </p:nvSpPr>
         <p:spPr>
           <a:xfrm>
-            <a:off x="502920" y="3840480"/>
-            <a:ext cx="11201400" cy="9525"/>
-          </a:xfrm>
-          <a:prstGeom prst="rect">
-            <a:avLst/>
-          </a:prstGeom>
-          <a:solidFill>
-            <a:srgbClr val="CCCCCC"/>
-          </a:solidFill>
-          <a:ln>
-            <a:noFill/>
-          </a:ln>
-        </p:spPr>
-        <p:style>
-          <a:lnRef idx="1">
-            <a:schemeClr val="accent1"/>
-          </a:lnRef>
-          <a:fillRef idx="3">
-            <a:schemeClr val="accent1"/>
-          </a:fillRef>
-          <a:effectRef idx="2">
-            <a:schemeClr val="accent1"/>
-          </a:effectRef>
-          <a:fontRef idx="minor">
-            <a:schemeClr val="lt1"/>
-          </a:fontRef>
-        </p:style>
-        <p:txBody>
-          <a:bodyPr rtlCol="0" anchor="ctr"/>
-          <a:lstStyle/>
-          <a:p>
-            <a:pPr algn="ctr"/>
-          </a:p>
-        </p:txBody>
-      </p:sp>
-      <p:sp>
-        <p:nvSpPr>
-          <p:cNvPr id="13" name="TextBox 12"/>
-          <p:cNvSpPr txBox="1"/>
-          <p:nvPr/>
-        </p:nvSpPr>
-        <p:spPr>
-          <a:xfrm>
-            <a:off x="502920" y="3886200"/>
-            <a:ext cx="4937760" cy="822960"/>
-          </a:xfrm>
-          <a:prstGeom prst="rect">
-            <a:avLst/>
-          </a:prstGeom>
-          <a:noFill/>
-        </p:spPr>
-        <p:txBody>
-          <a:bodyPr wrap="square" anchor="t" lIns="0" rIns="0" tIns="0" bIns="0">
-            <a:spAutoFit/>
-          </a:bodyPr>
-          <a:lstStyle/>
-          <a:p>
-            <a:pPr algn="l"/>
-            <a:r>
-              <a:rPr sz="2000" b="1">
-                <a:solidFill>
-                  <a:srgbClr val="1A1A1A"/>
-                </a:solidFill>
-                <a:latin typeface="Calibri"/>
-              </a:rPr>
-              <a:t>PROCESSI</a:t>
-            </a:r>
-          </a:p>
-        </p:txBody>
-      </p:sp>
-      <p:sp>
-        <p:nvSpPr>
-          <p:cNvPr id="14" name="TextBox 13"/>
-          <p:cNvSpPr txBox="1"/>
-          <p:nvPr/>
-        </p:nvSpPr>
-        <p:spPr>
-          <a:xfrm>
-            <a:off x="5486400" y="3886200"/>
-            <a:ext cx="5486400" cy="822960"/>
-          </a:xfrm>
-          <a:prstGeom prst="rect">
-            <a:avLst/>
-          </a:prstGeom>
-          <a:noFill/>
-        </p:spPr>
-        <p:txBody>
-          <a:bodyPr wrap="square" anchor="t" lIns="0" rIns="0" tIns="0" bIns="0">
-            <a:spAutoFit/>
-          </a:bodyPr>
-          <a:lstStyle/>
-          <a:p>
-            <a:pPr algn="l"/>
-            <a:r>
-              <a:rPr sz="2000" b="0">
-                <a:solidFill>
-                  <a:srgbClr val="555555"/>
-                </a:solidFill>
-                <a:latin typeface="Calibri"/>
-              </a:rPr>
-              <a:t>{{processi.risultato}}</a:t>
-            </a:r>
-          </a:p>
-        </p:txBody>
-      </p:sp>
-      <p:sp>
-        <p:nvSpPr>
-          <p:cNvPr id="15" name="Rectangle 14"/>
-          <p:cNvSpPr/>
-          <p:nvPr/>
-        </p:nvSpPr>
-        <p:spPr>
-          <a:xfrm>
-            <a:off x="502920" y="4663440"/>
-            <a:ext cx="11201400" cy="9525"/>
-          </a:xfrm>
-          <a:prstGeom prst="rect">
-            <a:avLst/>
-          </a:prstGeom>
-          <a:solidFill>
-            <a:srgbClr val="CCCCCC"/>
-          </a:solidFill>
-          <a:ln>
-            <a:noFill/>
-          </a:ln>
-        </p:spPr>
-        <p:style>
-          <a:lnRef idx="1">
-            <a:schemeClr val="accent1"/>
-          </a:lnRef>
-          <a:fillRef idx="3">
-            <a:schemeClr val="accent1"/>
-          </a:fillRef>
-          <a:effectRef idx="2">
-            <a:schemeClr val="accent1"/>
-          </a:effectRef>
-          <a:fontRef idx="minor">
-            <a:schemeClr val="lt1"/>
-          </a:fontRef>
-        </p:style>
-        <p:txBody>
-          <a:bodyPr rtlCol="0" anchor="ctr"/>
-          <a:lstStyle/>
-          <a:p>
-            <a:pPr algn="ctr"/>
-          </a:p>
-        </p:txBody>
-      </p:sp>
-      <p:sp>
-        <p:nvSpPr>
-          <p:cNvPr id="16" name="TextBox 15"/>
-          <p:cNvSpPr txBox="1"/>
-          <p:nvPr/>
-        </p:nvSpPr>
-        <p:spPr>
-          <a:xfrm>
-            <a:off x="502920" y="4709160"/>
-            <a:ext cx="4937760" cy="822960"/>
-          </a:xfrm>
-          <a:prstGeom prst="rect">
-            <a:avLst/>
-          </a:prstGeom>
-          <a:noFill/>
-        </p:spPr>
-        <p:txBody>
-          <a:bodyPr wrap="square" anchor="t" lIns="0" rIns="0" tIns="0" bIns="0">
-            <a:spAutoFit/>
-          </a:bodyPr>
-          <a:lstStyle/>
-          <a:p>
-            <a:pPr algn="l"/>
-            <a:r>
-              <a:rPr sz="2000" b="1">
-                <a:solidFill>
-                  <a:srgbClr val="1A1A1A"/>
-                </a:solidFill>
-                <a:latin typeface="Calibri"/>
-              </a:rPr>
-              <a:t>MERCATO</a:t>
-            </a:r>
-          </a:p>
-        </p:txBody>
-      </p:sp>
-      <p:sp>
-        <p:nvSpPr>
-          <p:cNvPr id="17" name="TextBox 16"/>
-          <p:cNvSpPr txBox="1"/>
-          <p:nvPr/>
-        </p:nvSpPr>
-        <p:spPr>
-          <a:xfrm>
-            <a:off x="5486400" y="4709160"/>
-            <a:ext cx="5486400" cy="822960"/>
-          </a:xfrm>
-          <a:prstGeom prst="rect">
-            <a:avLst/>
-          </a:prstGeom>
-          <a:noFill/>
-        </p:spPr>
-        <p:txBody>
-          <a:bodyPr wrap="square" anchor="t" lIns="0" rIns="0" tIns="0" bIns="0">
-            <a:spAutoFit/>
-          </a:bodyPr>
-          <a:lstStyle/>
-          <a:p>
-            <a:pPr algn="l"/>
-            <a:r>
-              <a:rPr sz="2000" b="0">
-                <a:solidFill>
-                  <a:srgbClr val="555555"/>
-                </a:solidFill>
-                <a:latin typeface="Calibri"/>
-              </a:rPr>
-              <a:t>{{mercato.risultato}}</a:t>
-            </a:r>
-          </a:p>
-        </p:txBody>
-      </p:sp>
-      <p:sp>
-        <p:nvSpPr>
-          <p:cNvPr id="18" name="Rectangle 17"/>
-          <p:cNvSpPr/>
-          <p:nvPr/>
-        </p:nvSpPr>
-        <p:spPr>
-          <a:xfrm>
-            <a:off x="502920" y="5486400"/>
+            <a:off x="502920" y="6821424"/>
             <a:ext cx="11201400" cy="9525"/>
           </a:xfrm>
           <a:prstGeom prst="rect">
@@ -3870,7 +4612,7 @@
                 </a:solidFill>
                 <a:latin typeface="Calibri"/>
               </a:rPr>
-              <a:t>STRATEGIA</a:t>
+              <a:t>CULTURA</a:t>
             </a:r>
           </a:p>
         </p:txBody>
@@ -3940,7 +4682,7 @@
                 </a:solidFill>
                 <a:latin typeface="Calibri"/>
               </a:rPr>
-              <a:t>{{strategia.risultato}}</a:t>
+              <a:t>{{cultura.risultato}}</a:t>
             </a:r>
           </a:p>
         </p:txBody>
@@ -4010,7 +4752,7 @@
                 </a:solidFill>
                 <a:latin typeface="Calibri"/>
               </a:rPr>
-              <a:t>{{strategia.commento}}</a:t>
+              <a:t>{{cultura.commento}}</a:t>
             </a:r>
           </a:p>
         </p:txBody>
@@ -4150,7 +4892,7 @@
                 </a:solidFill>
                 <a:latin typeface="Calibri"/>
               </a:rPr>
-              <a:t>Strategia e Pianificazione</a:t>
+              <a:t>Cultura e Comportamenti</a:t>
             </a:r>
           </a:p>
         </p:txBody>
@@ -4185,7 +4927,7 @@
                 </a:solidFill>
                 <a:latin typeface="Calibri"/>
               </a:rPr>
-              <a:t>{{strategia_pianificazione.risultato}}</a:t>
+              <a:t>{{cultura_comportamenti.risultato}}</a:t>
             </a:r>
           </a:p>
         </p:txBody>
@@ -4220,7 +4962,7 @@
                 </a:solidFill>
                 <a:latin typeface="Calibri"/>
               </a:rPr>
-              <a:t>{{strategia_pianificazione.attivita}}</a:t>
+              <a:t>{{cultura_comportamenti.attivita}}</a:t>
             </a:r>
           </a:p>
         </p:txBody>
@@ -4298,7 +5040,7 @@
                 </a:solidFill>
                 <a:latin typeface="Calibri"/>
               </a:rPr>
-              <a:t>Governance e Leadership</a:t>
+              <a:t>Benessere e Sicurezza Psicologica</a:t>
             </a:r>
           </a:p>
         </p:txBody>
@@ -4333,7 +5075,7 @@
                 </a:solidFill>
                 <a:latin typeface="Calibri"/>
               </a:rPr>
-              <a:t>{{governance_leadership.risultato}}</a:t>
+              <a:t>{{benessere_sicurezza.risultato}}</a:t>
             </a:r>
           </a:p>
         </p:txBody>
@@ -4368,7 +5110,7 @@
                 </a:solidFill>
                 <a:latin typeface="Calibri"/>
               </a:rPr>
-              <a:t>{{governance_leadership.attivita}}</a:t>
+              <a:t>{{benessere_sicurezza.attivita}}</a:t>
             </a:r>
           </a:p>
         </p:txBody>
@@ -4446,7 +5188,7 @@
                 </a:solidFill>
                 <a:latin typeface="Calibri"/>
               </a:rPr>
-              <a:t>Misurazione e Impatto</a:t>
+              <a:t>Formazione e Consapevolezza</a:t>
             </a:r>
           </a:p>
         </p:txBody>
@@ -4481,7 +5223,7 @@
                 </a:solidFill>
                 <a:latin typeface="Calibri"/>
               </a:rPr>
-              <a:t>{{misurazione_impatto.risultato}}</a:t>
+              <a:t>{{formazione_consapevolezza.risultato}}</a:t>
             </a:r>
           </a:p>
         </p:txBody>
@@ -4516,7 +5258,7 @@
                 </a:solidFill>
                 <a:latin typeface="Calibri"/>
               </a:rPr>
-              <a:t>{{misurazione_impatto.attivita}}</a:t>
+              <a:t>{{formazione_consapevolezza.attivita}}</a:t>
             </a:r>
           </a:p>
         </p:txBody>
@@ -4655,7 +5397,7 @@
                 </a:solidFill>
                 <a:latin typeface="Calibri"/>
               </a:rPr>
-              <a:t>CULTURA</a:t>
+              <a:t>PROCESSI</a:t>
             </a:r>
           </a:p>
         </p:txBody>
@@ -4725,7 +5467,7 @@
                 </a:solidFill>
                 <a:latin typeface="Calibri"/>
               </a:rPr>
-              <a:t>{{cultura.risultato}}</a:t>
+              <a:t>{{processi.risultato}}</a:t>
             </a:r>
           </a:p>
         </p:txBody>
@@ -4795,7 +5537,7 @@
                 </a:solidFill>
                 <a:latin typeface="Calibri"/>
               </a:rPr>
-              <a:t>{{cultura.commento}}</a:t>
+              <a:t>{{processi.commento}}</a:t>
             </a:r>
           </a:p>
         </p:txBody>
@@ -4935,7 +5677,7 @@
                 </a:solidFill>
                 <a:latin typeface="Calibri"/>
               </a:rPr>
-              <a:t>Cultura e Comportamenti</a:t>
+              <a:t>Processi Operativi e Accessibilità</a:t>
             </a:r>
           </a:p>
         </p:txBody>
@@ -4970,7 +5712,7 @@
                 </a:solidFill>
                 <a:latin typeface="Calibri"/>
               </a:rPr>
-              <a:t>{{cultura_comportamenti.risultato}}</a:t>
+              <a:t>{{processi_operativi_accessibilita.risultato}}</a:t>
             </a:r>
           </a:p>
         </p:txBody>
@@ -5005,7 +5747,7 @@
                 </a:solidFill>
                 <a:latin typeface="Calibri"/>
               </a:rPr>
-              <a:t>{{cultura_comportamenti.attivita}}</a:t>
+              <a:t>{{processi_operativi_accessibilita.attivita}}</a:t>
             </a:r>
           </a:p>
         </p:txBody>
@@ -5083,7 +5825,7 @@
                 </a:solidFill>
                 <a:latin typeface="Calibri"/>
               </a:rPr>
-              <a:t>Benessere e Sicurezza Psicologica</a:t>
+              <a:t>Persone e Processi</a:t>
             </a:r>
           </a:p>
         </p:txBody>
@@ -5118,7 +5860,7 @@
                 </a:solidFill>
                 <a:latin typeface="Calibri"/>
               </a:rPr>
-              <a:t>{{benessere_sicurezza.risultato}}</a:t>
+              <a:t>{{persone_processi.risultato}}</a:t>
             </a:r>
           </a:p>
         </p:txBody>
@@ -5153,7 +5895,7 @@
                 </a:solidFill>
                 <a:latin typeface="Calibri"/>
               </a:rPr>
-              <a:t>{{benessere_sicurezza.attivita}}</a:t>
+              <a:t>{{persone_processi.attivita}}</a:t>
             </a:r>
           </a:p>
         </p:txBody>
@@ -5231,7 +5973,7 @@
                 </a:solidFill>
                 <a:latin typeface="Calibri"/>
               </a:rPr>
-              <a:t>Formazione e Consapevolezza</a:t>
+              <a:t>Innovazione, Ricerca e Sviluppo</a:t>
             </a:r>
           </a:p>
         </p:txBody>
@@ -5266,7 +6008,7 @@
                 </a:solidFill>
                 <a:latin typeface="Calibri"/>
               </a:rPr>
-              <a:t>{{formazione_consapevolezza.risultato}}</a:t>
+              <a:t>{{innovazione_ricerca_sviluppo.risultato}}</a:t>
             </a:r>
           </a:p>
         </p:txBody>
@@ -5301,7 +6043,7 @@
                 </a:solidFill>
                 <a:latin typeface="Calibri"/>
               </a:rPr>
-              <a:t>{{formazione_consapevolezza.attivita}}</a:t>
+              <a:t>{{innovazione_ricerca_sviluppo.attivita}}</a:t>
             </a:r>
           </a:p>
         </p:txBody>
@@ -5440,7 +6182,7 @@
                 </a:solidFill>
                 <a:latin typeface="Calibri"/>
               </a:rPr>
-              <a:t>PROCESSI</a:t>
+              <a:t>MERCATO</a:t>
             </a:r>
           </a:p>
         </p:txBody>
@@ -5510,7 +6252,7 @@
                 </a:solidFill>
                 <a:latin typeface="Calibri"/>
               </a:rPr>
-              <a:t>{{processi.risultato}}</a:t>
+              <a:t>{{mercato.risultato}}</a:t>
             </a:r>
           </a:p>
         </p:txBody>
@@ -5580,7 +6322,7 @@
                 </a:solidFill>
                 <a:latin typeface="Calibri"/>
               </a:rPr>
-              <a:t>{{processi.commento}}</a:t>
+              <a:t>{{mercato.commento}}</a:t>
             </a:r>
           </a:p>
         </p:txBody>
@@ -5720,7 +6462,7 @@
                 </a:solidFill>
                 <a:latin typeface="Calibri"/>
               </a:rPr>
-              <a:t>Processi Operativi e Accessibilità</a:t>
+              <a:t>Brand, Comunicazione e Rappresentazione</a:t>
             </a:r>
           </a:p>
         </p:txBody>
@@ -5755,7 +6497,7 @@
                 </a:solidFill>
                 <a:latin typeface="Calibri"/>
               </a:rPr>
-              <a:t>{{processi_operativi_accessibilita.risultato}}</a:t>
+              <a:t>{{brand_comunicazione_rappresentazione.risultato}}</a:t>
             </a:r>
           </a:p>
         </p:txBody>
@@ -5790,7 +6532,7 @@
                 </a:solidFill>
                 <a:latin typeface="Calibri"/>
               </a:rPr>
-              <a:t>{{processi_operativi_accessibilita.attivita}}</a:t>
+              <a:t>{{brand_comunicazione_rappresentazione.attivita}}</a:t>
             </a:r>
           </a:p>
         </p:txBody>
@@ -5868,7 +6610,7 @@
                 </a:solidFill>
                 <a:latin typeface="Calibri"/>
               </a:rPr>
-              <a:t>Persone e Processi</a:t>
+              <a:t>Clienti, Utenti e Accessibilità</a:t>
             </a:r>
           </a:p>
         </p:txBody>
@@ -5903,7 +6645,7 @@
                 </a:solidFill>
                 <a:latin typeface="Calibri"/>
               </a:rPr>
-              <a:t>{{persone_processi.risultato}}</a:t>
+              <a:t>{{clienti_utenti_accessibilita.risultato}}</a:t>
             </a:r>
           </a:p>
         </p:txBody>
@@ -5938,7 +6680,7 @@
                 </a:solidFill>
                 <a:latin typeface="Calibri"/>
               </a:rPr>
-              <a:t>{{persone_processi.attivita}}</a:t>
+              <a:t>{{clienti_utenti_accessibilita.attivita}}</a:t>
             </a:r>
           </a:p>
         </p:txBody>
@@ -6016,7 +6758,7 @@
                 </a:solidFill>
                 <a:latin typeface="Calibri"/>
               </a:rPr>
-              <a:t>Innovazione, Ricerca e Sviluppo</a:t>
+              <a:t>Impatto Sociale e Posizionamento</a:t>
             </a:r>
           </a:p>
         </p:txBody>
@@ -6051,7 +6793,7 @@
                 </a:solidFill>
                 <a:latin typeface="Calibri"/>
               </a:rPr>
-              <a:t>{{innovazione_ricerca_sviluppo.risultato}}</a:t>
+              <a:t>{{impatto_sociale_posizionamento.risultato}}</a:t>
             </a:r>
           </a:p>
         </p:txBody>
@@ -6086,7 +6828,7 @@
                 </a:solidFill>
                 <a:latin typeface="Calibri"/>
               </a:rPr>
-              <a:t>{{innovazione_ricerca_sviluppo.attivita}}</a:t>
+              <a:t>{{impatto_sociale_posizionamento.attivita}}</a:t>
             </a:r>
           </a:p>
         </p:txBody>
@@ -6204,7 +6946,7 @@
         <p:spPr>
           <a:xfrm>
             <a:off x="502920" y="475488"/>
-            <a:ext cx="8229600" cy="731520"/>
+            <a:ext cx="10058400" cy="731520"/>
           </a:xfrm>
           <a:prstGeom prst="rect">
             <a:avLst/>
@@ -6225,7 +6967,7 @@
                 </a:solidFill>
                 <a:latin typeface="Calibri"/>
               </a:rPr>
-              <a:t>MERCATO</a:t>
+              <a:t>PROFILO DI MATURITÀ</a:t>
             </a:r>
           </a:p>
         </p:txBody>
@@ -6238,63 +6980,309 @@
         </p:nvSpPr>
         <p:spPr>
           <a:xfrm>
-            <a:off x="502920" y="1508760"/>
-            <a:ext cx="2103120" cy="320040"/>
-          </a:xfrm>
-          <a:prstGeom prst="rect">
-            <a:avLst/>
-          </a:prstGeom>
-          <a:noFill/>
-        </p:spPr>
-        <p:txBody>
-          <a:bodyPr wrap="square" anchor="t" lIns="0" rIns="0" tIns="0" bIns="0">
-            <a:spAutoFit/>
-          </a:bodyPr>
-          <a:lstStyle/>
-          <a:p>
-            <a:pPr algn="l"/>
-            <a:r>
-              <a:rPr sz="1300" b="1">
+            <a:off x="502920" y="1078992"/>
+            <a:ext cx="10515600" cy="365760"/>
+          </a:xfrm>
+          <a:prstGeom prst="rect">
+            <a:avLst/>
+          </a:prstGeom>
+          <a:noFill/>
+        </p:spPr>
+        <p:txBody>
+          <a:bodyPr wrap="square" anchor="t" lIns="0" rIns="0" tIns="0" bIns="0">
+            <a:spAutoFit/>
+          </a:bodyPr>
+          <a:lstStyle/>
+          <a:p>
+            <a:pPr algn="l"/>
+            <a:r>
+              <a:rPr sz="1300" b="0">
+                <a:solidFill>
+                  <a:srgbClr val="555555"/>
+                </a:solidFill>
+                <a:latin typeface="Calibri"/>
+              </a:rPr>
+              <a:t>Distribuzione dei livelli di maturità per area (radar) e per area/sottogruppo (sunburst)</a:t>
+            </a:r>
+          </a:p>
+        </p:txBody>
+      </p:sp>
+      <p:sp>
+        <p:nvSpPr>
+          <p:cNvPr id="5" name="TextBox 4"/>
+          <p:cNvSpPr txBox="1"/>
+          <p:nvPr/>
+        </p:nvSpPr>
+        <p:spPr>
+          <a:xfrm>
+            <a:off x="502920" y="1600200"/>
+            <a:ext cx="3931920" cy="3931920"/>
+          </a:xfrm>
+          <a:prstGeom prst="rect">
+            <a:avLst/>
+          </a:prstGeom>
+          <a:noFill/>
+        </p:spPr>
+        <p:txBody>
+          <a:bodyPr wrap="square" anchor="t" lIns="0" rIns="0" tIns="0" bIns="0">
+            <a:spAutoFit/>
+          </a:bodyPr>
+          <a:lstStyle/>
+          <a:p>
+            <a:pPr algn="l"/>
+            <a:r>
+              <a:rPr sz="1200" b="0">
+                <a:solidFill>
+                  <a:srgbClr val="CCCCCC"/>
+                </a:solidFill>
+                <a:latin typeface="Calibri"/>
+              </a:rPr>
+              <a:t>{{radar.aree}}</a:t>
+            </a:r>
+          </a:p>
+        </p:txBody>
+      </p:sp>
+      <p:sp>
+        <p:nvSpPr>
+          <p:cNvPr id="6" name="TextBox 5"/>
+          <p:cNvSpPr txBox="1"/>
+          <p:nvPr/>
+        </p:nvSpPr>
+        <p:spPr>
+          <a:xfrm>
+            <a:off x="4526280" y="1600200"/>
+            <a:ext cx="3931920" cy="3931920"/>
+          </a:xfrm>
+          <a:prstGeom prst="rect">
+            <a:avLst/>
+          </a:prstGeom>
+          <a:noFill/>
+        </p:spPr>
+        <p:txBody>
+          <a:bodyPr wrap="square" anchor="t" lIns="0" rIns="0" tIns="0" bIns="0">
+            <a:spAutoFit/>
+          </a:bodyPr>
+          <a:lstStyle/>
+          <a:p>
+            <a:pPr algn="l"/>
+            <a:r>
+              <a:rPr sz="1200" b="0">
+                <a:solidFill>
+                  <a:srgbClr val="CCCCCC"/>
+                </a:solidFill>
+                <a:latin typeface="Calibri"/>
+              </a:rPr>
+              <a:t>{{sunburst.aree}}</a:t>
+            </a:r>
+          </a:p>
+        </p:txBody>
+      </p:sp>
+      <p:sp>
+        <p:nvSpPr>
+          <p:cNvPr id="7" name="TextBox 6"/>
+          <p:cNvSpPr txBox="1"/>
+          <p:nvPr/>
+        </p:nvSpPr>
+        <p:spPr>
+          <a:xfrm>
+            <a:off x="8595360" y="1783080"/>
+            <a:ext cx="3108960" cy="320040"/>
+          </a:xfrm>
+          <a:prstGeom prst="rect">
+            <a:avLst/>
+          </a:prstGeom>
+          <a:noFill/>
+        </p:spPr>
+        <p:txBody>
+          <a:bodyPr wrap="square" anchor="t" lIns="0" rIns="0" tIns="0" bIns="0">
+            <a:spAutoFit/>
+          </a:bodyPr>
+          <a:lstStyle/>
+          <a:p>
+            <a:pPr algn="l"/>
+            <a:r>
+              <a:rPr sz="1200" b="1">
                 <a:solidFill>
                   <a:srgbClr val="1A1A1A"/>
                 </a:solidFill>
                 <a:latin typeface="Calibri"/>
               </a:rPr>
-              <a:t>RISULTATO</a:t>
-            </a:r>
-          </a:p>
-        </p:txBody>
-      </p:sp>
-      <p:sp>
-        <p:nvSpPr>
-          <p:cNvPr id="5" name="TextBox 4"/>
-          <p:cNvSpPr txBox="1"/>
-          <p:nvPr/>
-        </p:nvSpPr>
-        <p:spPr>
-          <a:xfrm>
-            <a:off x="502920" y="1847088"/>
-            <a:ext cx="2103120" cy="365760"/>
-          </a:xfrm>
-          <a:prstGeom prst="rect">
-            <a:avLst/>
-          </a:prstGeom>
-          <a:noFill/>
-        </p:spPr>
-        <p:txBody>
-          <a:bodyPr wrap="square" anchor="t" lIns="0" rIns="0" tIns="0" bIns="0">
-            <a:spAutoFit/>
-          </a:bodyPr>
-          <a:lstStyle/>
-          <a:p>
-            <a:pPr algn="l"/>
-            <a:r>
-              <a:rPr sz="1400" b="0">
+              <a:t>LIVELLI PER AREA</a:t>
+            </a:r>
+          </a:p>
+        </p:txBody>
+      </p:sp>
+      <p:sp>
+        <p:nvSpPr>
+          <p:cNvPr id="8" name="TextBox 7"/>
+          <p:cNvSpPr txBox="1"/>
+          <p:nvPr/>
+        </p:nvSpPr>
+        <p:spPr>
+          <a:xfrm>
+            <a:off x="8595360" y="2240280"/>
+            <a:ext cx="3108960" cy="457200"/>
+          </a:xfrm>
+          <a:prstGeom prst="rect">
+            <a:avLst/>
+          </a:prstGeom>
+          <a:noFill/>
+        </p:spPr>
+        <p:txBody>
+          <a:bodyPr wrap="square" anchor="t" lIns="0" rIns="0" tIns="0" bIns="0">
+            <a:spAutoFit/>
+          </a:bodyPr>
+          <a:lstStyle/>
+          <a:p>
+            <a:pPr algn="l"/>
+            <a:r>
+              <a:rPr sz="1200" b="1">
+                <a:solidFill>
+                  <a:srgbClr val="1A1A1A"/>
+                </a:solidFill>
+                <a:latin typeface="Calibri"/>
+              </a:rPr>
+              <a:t>STRATEGIA  </a:t>
+            </a:r>
+            <a:r>
+              <a:rPr sz="1200" b="0">
                 <a:solidFill>
                   <a:srgbClr val="555555"/>
                 </a:solidFill>
                 <a:latin typeface="Calibri"/>
               </a:rPr>
+              <a:t>{{strategia.risultato}}</a:t>
+            </a:r>
+          </a:p>
+        </p:txBody>
+      </p:sp>
+      <p:sp>
+        <p:nvSpPr>
+          <p:cNvPr id="9" name="TextBox 8"/>
+          <p:cNvSpPr txBox="1"/>
+          <p:nvPr/>
+        </p:nvSpPr>
+        <p:spPr>
+          <a:xfrm>
+            <a:off x="8595360" y="2770632"/>
+            <a:ext cx="3108960" cy="457200"/>
+          </a:xfrm>
+          <a:prstGeom prst="rect">
+            <a:avLst/>
+          </a:prstGeom>
+          <a:noFill/>
+        </p:spPr>
+        <p:txBody>
+          <a:bodyPr wrap="square" anchor="t" lIns="0" rIns="0" tIns="0" bIns="0">
+            <a:spAutoFit/>
+          </a:bodyPr>
+          <a:lstStyle/>
+          <a:p>
+            <a:pPr algn="l"/>
+            <a:r>
+              <a:rPr sz="1200" b="1">
+                <a:solidFill>
+                  <a:srgbClr val="1A1A1A"/>
+                </a:solidFill>
+                <a:latin typeface="Calibri"/>
+              </a:rPr>
+              <a:t>CULTURA  </a:t>
+            </a:r>
+            <a:r>
+              <a:rPr sz="1200" b="0">
+                <a:solidFill>
+                  <a:srgbClr val="555555"/>
+                </a:solidFill>
+                <a:latin typeface="Calibri"/>
+              </a:rPr>
+              <a:t>{{cultura.risultato}}</a:t>
+            </a:r>
+          </a:p>
+        </p:txBody>
+      </p:sp>
+      <p:sp>
+        <p:nvSpPr>
+          <p:cNvPr id="10" name="TextBox 9"/>
+          <p:cNvSpPr txBox="1"/>
+          <p:nvPr/>
+        </p:nvSpPr>
+        <p:spPr>
+          <a:xfrm>
+            <a:off x="8595360" y="3300984"/>
+            <a:ext cx="3108960" cy="457200"/>
+          </a:xfrm>
+          <a:prstGeom prst="rect">
+            <a:avLst/>
+          </a:prstGeom>
+          <a:noFill/>
+        </p:spPr>
+        <p:txBody>
+          <a:bodyPr wrap="square" anchor="t" lIns="0" rIns="0" tIns="0" bIns="0">
+            <a:spAutoFit/>
+          </a:bodyPr>
+          <a:lstStyle/>
+          <a:p>
+            <a:pPr algn="l"/>
+            <a:r>
+              <a:rPr sz="1200" b="1">
+                <a:solidFill>
+                  <a:srgbClr val="1A1A1A"/>
+                </a:solidFill>
+                <a:latin typeface="Calibri"/>
+              </a:rPr>
+              <a:t>PROCESSI  </a:t>
+            </a:r>
+            <a:r>
+              <a:rPr sz="1200" b="0">
+                <a:solidFill>
+                  <a:srgbClr val="555555"/>
+                </a:solidFill>
+                <a:latin typeface="Calibri"/>
+              </a:rPr>
+              <a:t>{{processi.risultato}}</a:t>
+            </a:r>
+          </a:p>
+        </p:txBody>
+      </p:sp>
+      <p:sp>
+        <p:nvSpPr>
+          <p:cNvPr id="11" name="TextBox 10"/>
+          <p:cNvSpPr txBox="1"/>
+          <p:nvPr/>
+        </p:nvSpPr>
+        <p:spPr>
+          <a:xfrm>
+            <a:off x="8595360" y="3831336"/>
+            <a:ext cx="3108960" cy="457200"/>
+          </a:xfrm>
+          <a:prstGeom prst="rect">
+            <a:avLst/>
+          </a:prstGeom>
+          <a:noFill/>
+        </p:spPr>
+        <p:txBody>
+          <a:bodyPr wrap="square" anchor="t" lIns="0" rIns="0" tIns="0" bIns="0">
+            <a:spAutoFit/>
+          </a:bodyPr>
+          <a:lstStyle/>
+          <a:p>
+            <a:pPr algn="l"/>
+            <a:r>
+              <a:rPr sz="1200" b="1">
+                <a:solidFill>
+                  <a:srgbClr val="1A1A1A"/>
+                </a:solidFill>
+                <a:latin typeface="Calibri"/>
+              </a:rPr>
+              <a:t>MERCATO  </a:t>
+            </a:r>
+            <a:r>
+              <a:rPr sz="1200" b="0">
+                <a:solidFill>
+                  <a:srgbClr val="555555"/>
+                </a:solidFill>
+                <a:latin typeface="Calibri"/>
+              </a:rPr>
               <a:t>{{mercato.risultato}}</a:t>
             </a:r>
           </a:p>
@@ -6302,294 +7290,14 @@
       </p:sp>
       <p:sp>
         <p:nvSpPr>
-          <p:cNvPr id="6" name="TextBox 5"/>
-          <p:cNvSpPr txBox="1"/>
-          <p:nvPr/>
-        </p:nvSpPr>
-        <p:spPr>
-          <a:xfrm>
-            <a:off x="2834640" y="1508760"/>
-            <a:ext cx="8778240" cy="320040"/>
-          </a:xfrm>
-          <a:prstGeom prst="rect">
-            <a:avLst/>
-          </a:prstGeom>
-          <a:noFill/>
-        </p:spPr>
-        <p:txBody>
-          <a:bodyPr wrap="square" anchor="t" lIns="0" rIns="0" tIns="0" bIns="0">
-            <a:spAutoFit/>
-          </a:bodyPr>
-          <a:lstStyle/>
-          <a:p>
-            <a:pPr algn="l"/>
-            <a:r>
-              <a:rPr sz="1300" b="1">
-                <a:solidFill>
-                  <a:srgbClr val="1A1A1A"/>
-                </a:solidFill>
-                <a:latin typeface="Calibri"/>
-              </a:rPr>
-              <a:t>COMMENTO</a:t>
-            </a:r>
-          </a:p>
-        </p:txBody>
-      </p:sp>
-      <p:sp>
-        <p:nvSpPr>
-          <p:cNvPr id="7" name="TextBox 6"/>
-          <p:cNvSpPr txBox="1"/>
-          <p:nvPr/>
-        </p:nvSpPr>
-        <p:spPr>
-          <a:xfrm>
-            <a:off x="2834640" y="1847088"/>
-            <a:ext cx="8869680" cy="1554480"/>
-          </a:xfrm>
-          <a:prstGeom prst="rect">
-            <a:avLst/>
-          </a:prstGeom>
-          <a:noFill/>
-        </p:spPr>
-        <p:txBody>
-          <a:bodyPr wrap="square" anchor="t" lIns="0" rIns="0" tIns="0" bIns="0">
-            <a:spAutoFit/>
-          </a:bodyPr>
-          <a:lstStyle/>
-          <a:p>
-            <a:pPr algn="l"/>
-            <a:r>
-              <a:rPr sz="1050" b="0">
-                <a:solidFill>
-                  <a:srgbClr val="555555"/>
-                </a:solidFill>
-                <a:latin typeface="Calibri"/>
-              </a:rPr>
-              <a:t>{{mercato.commento}}</a:t>
-            </a:r>
-          </a:p>
-        </p:txBody>
-      </p:sp>
-      <p:sp>
-        <p:nvSpPr>
-          <p:cNvPr id="8" name="TextBox 7"/>
-          <p:cNvSpPr txBox="1"/>
-          <p:nvPr/>
-        </p:nvSpPr>
-        <p:spPr>
-          <a:xfrm>
-            <a:off x="502920" y="3611880"/>
-            <a:ext cx="3108960" cy="320040"/>
-          </a:xfrm>
-          <a:prstGeom prst="rect">
-            <a:avLst/>
-          </a:prstGeom>
-          <a:noFill/>
-        </p:spPr>
-        <p:txBody>
-          <a:bodyPr wrap="square" anchor="t" lIns="0" rIns="0" tIns="0" bIns="0">
-            <a:spAutoFit/>
-          </a:bodyPr>
-          <a:lstStyle/>
-          <a:p>
-            <a:pPr algn="l"/>
-            <a:r>
-              <a:rPr sz="1300" b="1">
-                <a:solidFill>
-                  <a:srgbClr val="1A1A1A"/>
-                </a:solidFill>
-                <a:latin typeface="Calibri"/>
-              </a:rPr>
-              <a:t>SOTTOGRUPPO</a:t>
-            </a:r>
-          </a:p>
-        </p:txBody>
-      </p:sp>
-      <p:sp>
-        <p:nvSpPr>
-          <p:cNvPr id="9" name="TextBox 8"/>
-          <p:cNvSpPr txBox="1"/>
-          <p:nvPr/>
-        </p:nvSpPr>
-        <p:spPr>
-          <a:xfrm>
-            <a:off x="3794760" y="3611880"/>
-            <a:ext cx="2011680" cy="320040"/>
-          </a:xfrm>
-          <a:prstGeom prst="rect">
-            <a:avLst/>
-          </a:prstGeom>
-          <a:noFill/>
-        </p:spPr>
-        <p:txBody>
-          <a:bodyPr wrap="square" anchor="t" lIns="0" rIns="0" tIns="0" bIns="0">
-            <a:spAutoFit/>
-          </a:bodyPr>
-          <a:lstStyle/>
-          <a:p>
-            <a:pPr algn="l"/>
-            <a:r>
-              <a:rPr sz="1300" b="1">
-                <a:solidFill>
-                  <a:srgbClr val="1A1A1A"/>
-                </a:solidFill>
-                <a:latin typeface="Calibri"/>
-              </a:rPr>
-              <a:t>RISULTATO</a:t>
-            </a:r>
-          </a:p>
-        </p:txBody>
-      </p:sp>
-      <p:sp>
-        <p:nvSpPr>
-          <p:cNvPr id="10" name="TextBox 9"/>
-          <p:cNvSpPr txBox="1"/>
-          <p:nvPr/>
-        </p:nvSpPr>
-        <p:spPr>
-          <a:xfrm>
-            <a:off x="5989320" y="3611880"/>
-            <a:ext cx="5669280" cy="320040"/>
-          </a:xfrm>
-          <a:prstGeom prst="rect">
-            <a:avLst/>
-          </a:prstGeom>
-          <a:noFill/>
-        </p:spPr>
-        <p:txBody>
-          <a:bodyPr wrap="square" anchor="t" lIns="0" rIns="0" tIns="0" bIns="0">
-            <a:spAutoFit/>
-          </a:bodyPr>
-          <a:lstStyle/>
-          <a:p>
-            <a:pPr algn="l"/>
-            <a:r>
-              <a:rPr sz="1300" b="1">
-                <a:solidFill>
-                  <a:srgbClr val="1A1A1A"/>
-                </a:solidFill>
-                <a:latin typeface="Calibri"/>
-              </a:rPr>
-              <a:t>ATTIVITÀ SUGGERITE</a:t>
-            </a:r>
-          </a:p>
-        </p:txBody>
-      </p:sp>
-      <p:sp>
-        <p:nvSpPr>
-          <p:cNvPr id="11" name="TextBox 10"/>
-          <p:cNvSpPr txBox="1"/>
-          <p:nvPr/>
-        </p:nvSpPr>
-        <p:spPr>
-          <a:xfrm>
-            <a:off x="502920" y="4023360"/>
-            <a:ext cx="3154680" cy="932688"/>
-          </a:xfrm>
-          <a:prstGeom prst="rect">
-            <a:avLst/>
-          </a:prstGeom>
-          <a:noFill/>
-        </p:spPr>
-        <p:txBody>
-          <a:bodyPr wrap="square" anchor="t" lIns="0" rIns="0" tIns="0" bIns="0">
-            <a:spAutoFit/>
-          </a:bodyPr>
-          <a:lstStyle/>
-          <a:p>
-            <a:pPr algn="l"/>
-            <a:r>
-              <a:rPr sz="1200" b="0">
-                <a:solidFill>
-                  <a:srgbClr val="1A1A1A"/>
-                </a:solidFill>
-                <a:latin typeface="Calibri"/>
-              </a:rPr>
-              <a:t>Brand, Comunicazione e Rappresentazione</a:t>
-            </a:r>
-          </a:p>
-        </p:txBody>
-      </p:sp>
-      <p:sp>
-        <p:nvSpPr>
-          <p:cNvPr id="12" name="TextBox 11"/>
-          <p:cNvSpPr txBox="1"/>
-          <p:nvPr/>
-        </p:nvSpPr>
-        <p:spPr>
-          <a:xfrm>
-            <a:off x="3794760" y="4023360"/>
-            <a:ext cx="2011680" cy="932688"/>
-          </a:xfrm>
-          <a:prstGeom prst="rect">
-            <a:avLst/>
-          </a:prstGeom>
-          <a:noFill/>
-        </p:spPr>
-        <p:txBody>
-          <a:bodyPr wrap="square" anchor="t" lIns="0" rIns="0" tIns="0" bIns="0">
-            <a:spAutoFit/>
-          </a:bodyPr>
-          <a:lstStyle/>
-          <a:p>
-            <a:pPr algn="l"/>
-            <a:r>
-              <a:rPr sz="1200" b="0">
-                <a:solidFill>
-                  <a:srgbClr val="555555"/>
-                </a:solidFill>
-                <a:latin typeface="Calibri"/>
-              </a:rPr>
-              <a:t>{{brand_comunicazione_rappresentazione.risultato}}</a:t>
-            </a:r>
-          </a:p>
-        </p:txBody>
-      </p:sp>
-      <p:sp>
-        <p:nvSpPr>
-          <p:cNvPr id="13" name="TextBox 12"/>
-          <p:cNvSpPr txBox="1"/>
-          <p:nvPr/>
-        </p:nvSpPr>
-        <p:spPr>
-          <a:xfrm>
-            <a:off x="5989320" y="4023360"/>
-            <a:ext cx="5715000" cy="932688"/>
-          </a:xfrm>
-          <a:prstGeom prst="rect">
-            <a:avLst/>
-          </a:prstGeom>
-          <a:noFill/>
-        </p:spPr>
-        <p:txBody>
-          <a:bodyPr wrap="square" anchor="t" lIns="0" rIns="0" tIns="0" bIns="0">
-            <a:spAutoFit/>
-          </a:bodyPr>
-          <a:lstStyle/>
-          <a:p>
-            <a:pPr algn="l"/>
-            <a:r>
-              <a:rPr sz="950" b="0">
-                <a:solidFill>
-                  <a:srgbClr val="555555"/>
-                </a:solidFill>
-                <a:latin typeface="Calibri"/>
-              </a:rPr>
-              <a:t>{{brand_comunicazione_rappresentazione.attivita}}</a:t>
-            </a:r>
-          </a:p>
-        </p:txBody>
-      </p:sp>
-      <p:sp>
-        <p:nvSpPr>
-          <p:cNvPr id="14" name="Rectangle 13"/>
+          <p:cNvPr id="12" name="Rectangle 11"/>
           <p:cNvSpPr/>
           <p:nvPr/>
         </p:nvSpPr>
         <p:spPr>
           <a:xfrm>
-            <a:off x="502920" y="4919472"/>
-            <a:ext cx="11201400" cy="9525"/>
+            <a:off x="8595360" y="4407408"/>
+            <a:ext cx="3108960" cy="9525"/>
           </a:xfrm>
           <a:prstGeom prst="rect">
             <a:avLst/>
@@ -6625,35 +7333,114 @@
       </p:sp>
       <p:sp>
         <p:nvSpPr>
+          <p:cNvPr id="13" name="TextBox 12"/>
+          <p:cNvSpPr txBox="1"/>
+          <p:nvPr/>
+        </p:nvSpPr>
+        <p:spPr>
+          <a:xfrm>
+            <a:off x="8595360" y="4562856"/>
+            <a:ext cx="3108960" cy="320040"/>
+          </a:xfrm>
+          <a:prstGeom prst="rect">
+            <a:avLst/>
+          </a:prstGeom>
+          <a:noFill/>
+        </p:spPr>
+        <p:txBody>
+          <a:bodyPr wrap="square" anchor="t" lIns="0" rIns="0" tIns="0" bIns="0">
+            <a:spAutoFit/>
+          </a:bodyPr>
+          <a:lstStyle/>
+          <a:p>
+            <a:pPr algn="l"/>
+            <a:r>
+              <a:rPr sz="1200" b="1">
+                <a:solidFill>
+                  <a:srgbClr val="1A1A1A"/>
+                </a:solidFill>
+                <a:latin typeface="Calibri"/>
+              </a:rPr>
+              <a:t>LIVELLO MACRO</a:t>
+            </a:r>
+          </a:p>
+        </p:txBody>
+      </p:sp>
+      <p:sp>
+        <p:nvSpPr>
+          <p:cNvPr id="14" name="TextBox 13"/>
+          <p:cNvSpPr txBox="1"/>
+          <p:nvPr/>
+        </p:nvSpPr>
+        <p:spPr>
+          <a:xfrm>
+            <a:off x="8595360" y="4928616"/>
+            <a:ext cx="3108960" cy="457200"/>
+          </a:xfrm>
+          <a:prstGeom prst="rect">
+            <a:avLst/>
+          </a:prstGeom>
+          <a:noFill/>
+        </p:spPr>
+        <p:txBody>
+          <a:bodyPr wrap="square" anchor="t" lIns="0" rIns="0" tIns="0" bIns="0">
+            <a:spAutoFit/>
+          </a:bodyPr>
+          <a:lstStyle/>
+          <a:p>
+            <a:pPr algn="l"/>
+            <a:r>
+              <a:rPr sz="1600" b="1">
+                <a:solidFill>
+                  <a:srgbClr val="E86A17"/>
+                </a:solidFill>
+                <a:latin typeface="Calibri"/>
+              </a:rPr>
+              <a:t>{{panoramica.risultato}}</a:t>
+            </a:r>
+          </a:p>
+        </p:txBody>
+      </p:sp>
+      <p:sp>
+        <p:nvSpPr>
           <p:cNvPr id="15" name="TextBox 14"/>
           <p:cNvSpPr txBox="1"/>
           <p:nvPr/>
         </p:nvSpPr>
         <p:spPr>
           <a:xfrm>
-            <a:off x="502920" y="4974336"/>
-            <a:ext cx="3154680" cy="932688"/>
-          </a:xfrm>
-          <a:prstGeom prst="rect">
-            <a:avLst/>
-          </a:prstGeom>
-          <a:noFill/>
-        </p:spPr>
-        <p:txBody>
-          <a:bodyPr wrap="square" anchor="t" lIns="0" rIns="0" tIns="0" bIns="0">
-            <a:spAutoFit/>
-          </a:bodyPr>
-          <a:lstStyle/>
-          <a:p>
-            <a:pPr algn="l"/>
-            <a:r>
-              <a:rPr sz="1200" b="0">
+            <a:off x="502920" y="5623560"/>
+            <a:ext cx="11201400" cy="274320"/>
+          </a:xfrm>
+          <a:prstGeom prst="rect">
+            <a:avLst/>
+          </a:prstGeom>
+          <a:noFill/>
+        </p:spPr>
+        <p:txBody>
+          <a:bodyPr wrap="square" anchor="t" lIns="0" rIns="0" tIns="0" bIns="0">
+            <a:spAutoFit/>
+          </a:bodyPr>
+          <a:lstStyle/>
+          <a:p>
+            <a:pPr algn="l"/>
+            <a:r>
+              <a:rPr sz="1000" b="1">
                 <a:solidFill>
                   <a:srgbClr val="1A1A1A"/>
                 </a:solidFill>
                 <a:latin typeface="Calibri"/>
               </a:rPr>
-              <a:t>Clienti, Utenti e Accessibilità</a:t>
+              <a:t>PUNTEGGIO MEDIO COMPLESSIVO   </a:t>
+            </a:r>
+            <a:r>
+              <a:rPr sz="1000" b="0">
+                <a:solidFill>
+                  <a:srgbClr val="555555"/>
+                </a:solidFill>
+                <a:latin typeface="Calibri"/>
+              </a:rPr>
+              <a:t>{{panoramica.livello_medio}}</a:t>
             </a:r>
           </a:p>
         </p:txBody>
@@ -6666,745 +7453,29 @@
         </p:nvSpPr>
         <p:spPr>
           <a:xfrm>
-            <a:off x="3794760" y="4974336"/>
-            <a:ext cx="2011680" cy="932688"/>
-          </a:xfrm>
-          <a:prstGeom prst="rect">
-            <a:avLst/>
-          </a:prstGeom>
-          <a:noFill/>
-        </p:spPr>
-        <p:txBody>
-          <a:bodyPr wrap="square" anchor="t" lIns="0" rIns="0" tIns="0" bIns="0">
-            <a:spAutoFit/>
-          </a:bodyPr>
-          <a:lstStyle/>
-          <a:p>
-            <a:pPr algn="l"/>
-            <a:r>
-              <a:rPr sz="1200" b="0">
+            <a:off x="502920" y="5943600"/>
+            <a:ext cx="11201400" cy="777240"/>
+          </a:xfrm>
+          <a:prstGeom prst="rect">
+            <a:avLst/>
+          </a:prstGeom>
+          <a:noFill/>
+        </p:spPr>
+        <p:txBody>
+          <a:bodyPr wrap="square" anchor="t" lIns="0" rIns="0" tIns="0" bIns="0">
+            <a:spAutoFit/>
+          </a:bodyPr>
+          <a:lstStyle/>
+          <a:p>
+            <a:pPr algn="l"/>
+            <a:r>
+              <a:rPr sz="1000" b="0">
                 <a:solidFill>
                   <a:srgbClr val="555555"/>
                 </a:solidFill>
                 <a:latin typeface="Calibri"/>
               </a:rPr>
-              <a:t>{{clienti_utenti_accessibilita.risultato}}</a:t>
-            </a:r>
-          </a:p>
-        </p:txBody>
-      </p:sp>
-      <p:sp>
-        <p:nvSpPr>
-          <p:cNvPr id="17" name="TextBox 16"/>
-          <p:cNvSpPr txBox="1"/>
-          <p:nvPr/>
-        </p:nvSpPr>
-        <p:spPr>
-          <a:xfrm>
-            <a:off x="5989320" y="4974336"/>
-            <a:ext cx="5715000" cy="932688"/>
-          </a:xfrm>
-          <a:prstGeom prst="rect">
-            <a:avLst/>
-          </a:prstGeom>
-          <a:noFill/>
-        </p:spPr>
-        <p:txBody>
-          <a:bodyPr wrap="square" anchor="t" lIns="0" rIns="0" tIns="0" bIns="0">
-            <a:spAutoFit/>
-          </a:bodyPr>
-          <a:lstStyle/>
-          <a:p>
-            <a:pPr algn="l"/>
-            <a:r>
-              <a:rPr sz="950" b="0">
-                <a:solidFill>
-                  <a:srgbClr val="555555"/>
-                </a:solidFill>
-                <a:latin typeface="Calibri"/>
-              </a:rPr>
-              <a:t>{{clienti_utenti_accessibilita.attivita}}</a:t>
-            </a:r>
-          </a:p>
-        </p:txBody>
-      </p:sp>
-      <p:sp>
-        <p:nvSpPr>
-          <p:cNvPr id="18" name="Rectangle 17"/>
-          <p:cNvSpPr/>
-          <p:nvPr/>
-        </p:nvSpPr>
-        <p:spPr>
-          <a:xfrm>
-            <a:off x="502920" y="5870448"/>
-            <a:ext cx="11201400" cy="9525"/>
-          </a:xfrm>
-          <a:prstGeom prst="rect">
-            <a:avLst/>
-          </a:prstGeom>
-          <a:solidFill>
-            <a:srgbClr val="CCCCCC"/>
-          </a:solidFill>
-          <a:ln>
-            <a:noFill/>
-          </a:ln>
-        </p:spPr>
-        <p:style>
-          <a:lnRef idx="1">
-            <a:schemeClr val="accent1"/>
-          </a:lnRef>
-          <a:fillRef idx="3">
-            <a:schemeClr val="accent1"/>
-          </a:fillRef>
-          <a:effectRef idx="2">
-            <a:schemeClr val="accent1"/>
-          </a:effectRef>
-          <a:fontRef idx="minor">
-            <a:schemeClr val="lt1"/>
-          </a:fontRef>
-        </p:style>
-        <p:txBody>
-          <a:bodyPr rtlCol="0" anchor="ctr"/>
-          <a:lstStyle/>
-          <a:p>
-            <a:pPr algn="ctr"/>
-          </a:p>
-        </p:txBody>
-      </p:sp>
-      <p:sp>
-        <p:nvSpPr>
-          <p:cNvPr id="19" name="TextBox 18"/>
-          <p:cNvSpPr txBox="1"/>
-          <p:nvPr/>
-        </p:nvSpPr>
-        <p:spPr>
-          <a:xfrm>
-            <a:off x="502920" y="5925312"/>
-            <a:ext cx="3154680" cy="932688"/>
-          </a:xfrm>
-          <a:prstGeom prst="rect">
-            <a:avLst/>
-          </a:prstGeom>
-          <a:noFill/>
-        </p:spPr>
-        <p:txBody>
-          <a:bodyPr wrap="square" anchor="t" lIns="0" rIns="0" tIns="0" bIns="0">
-            <a:spAutoFit/>
-          </a:bodyPr>
-          <a:lstStyle/>
-          <a:p>
-            <a:pPr algn="l"/>
-            <a:r>
-              <a:rPr sz="1200" b="0">
-                <a:solidFill>
-                  <a:srgbClr val="1A1A1A"/>
-                </a:solidFill>
-                <a:latin typeface="Calibri"/>
-              </a:rPr>
-              <a:t>Impatto Sociale e Posizionamento</a:t>
-            </a:r>
-          </a:p>
-        </p:txBody>
-      </p:sp>
-      <p:sp>
-        <p:nvSpPr>
-          <p:cNvPr id="20" name="TextBox 19"/>
-          <p:cNvSpPr txBox="1"/>
-          <p:nvPr/>
-        </p:nvSpPr>
-        <p:spPr>
-          <a:xfrm>
-            <a:off x="3794760" y="5925312"/>
-            <a:ext cx="2011680" cy="932688"/>
-          </a:xfrm>
-          <a:prstGeom prst="rect">
-            <a:avLst/>
-          </a:prstGeom>
-          <a:noFill/>
-        </p:spPr>
-        <p:txBody>
-          <a:bodyPr wrap="square" anchor="t" lIns="0" rIns="0" tIns="0" bIns="0">
-            <a:spAutoFit/>
-          </a:bodyPr>
-          <a:lstStyle/>
-          <a:p>
-            <a:pPr algn="l"/>
-            <a:r>
-              <a:rPr sz="1200" b="0">
-                <a:solidFill>
-                  <a:srgbClr val="555555"/>
-                </a:solidFill>
-                <a:latin typeface="Calibri"/>
-              </a:rPr>
-              <a:t>{{impatto_sociale_posizionamento.risultato}}</a:t>
-            </a:r>
-          </a:p>
-        </p:txBody>
-      </p:sp>
-      <p:sp>
-        <p:nvSpPr>
-          <p:cNvPr id="21" name="TextBox 20"/>
-          <p:cNvSpPr txBox="1"/>
-          <p:nvPr/>
-        </p:nvSpPr>
-        <p:spPr>
-          <a:xfrm>
-            <a:off x="5989320" y="5925312"/>
-            <a:ext cx="5715000" cy="932688"/>
-          </a:xfrm>
-          <a:prstGeom prst="rect">
-            <a:avLst/>
-          </a:prstGeom>
-          <a:noFill/>
-        </p:spPr>
-        <p:txBody>
-          <a:bodyPr wrap="square" anchor="t" lIns="0" rIns="0" tIns="0" bIns="0">
-            <a:spAutoFit/>
-          </a:bodyPr>
-          <a:lstStyle/>
-          <a:p>
-            <a:pPr algn="l"/>
-            <a:r>
-              <a:rPr sz="950" b="0">
-                <a:solidFill>
-                  <a:srgbClr val="555555"/>
-                </a:solidFill>
-                <a:latin typeface="Calibri"/>
-              </a:rPr>
-              <a:t>{{impatto_sociale_posizionamento.attivita}}</a:t>
-            </a:r>
-          </a:p>
-        </p:txBody>
-      </p:sp>
-      <p:sp>
-        <p:nvSpPr>
-          <p:cNvPr id="22" name="Rectangle 21"/>
-          <p:cNvSpPr/>
-          <p:nvPr/>
-        </p:nvSpPr>
-        <p:spPr>
-          <a:xfrm>
-            <a:off x="502920" y="6821424"/>
-            <a:ext cx="11201400" cy="9525"/>
-          </a:xfrm>
-          <a:prstGeom prst="rect">
-            <a:avLst/>
-          </a:prstGeom>
-          <a:solidFill>
-            <a:srgbClr val="CCCCCC"/>
-          </a:solidFill>
-          <a:ln>
-            <a:noFill/>
-          </a:ln>
-        </p:spPr>
-        <p:style>
-          <a:lnRef idx="1">
-            <a:schemeClr val="accent1"/>
-          </a:lnRef>
-          <a:fillRef idx="3">
-            <a:schemeClr val="accent1"/>
-          </a:fillRef>
-          <a:effectRef idx="2">
-            <a:schemeClr val="accent1"/>
-          </a:effectRef>
-          <a:fontRef idx="minor">
-            <a:schemeClr val="lt1"/>
-          </a:fontRef>
-        </p:style>
-        <p:txBody>
-          <a:bodyPr rtlCol="0" anchor="ctr"/>
-          <a:lstStyle/>
-          <a:p>
-            <a:pPr algn="ctr"/>
-          </a:p>
-        </p:txBody>
-      </p:sp>
-    </p:spTree>
-  </p:cSld>
-  <p:clrMapOvr>
-    <a:masterClrMapping/>
-  </p:clrMapOvr>
-</p:sld>
-</file>
-
-<file path=ppt/slides/slide7.xml><?xml version="1.0" encoding="utf-8"?>
-<p:sld xmlns:a="http://schemas.openxmlformats.org/drawingml/2006/main" xmlns:p="http://schemas.openxmlformats.org/presentationml/2006/main" xmlns:r="http://schemas.openxmlformats.org/officeDocument/2006/relationships">
-  <p:cSld>
-    <p:spTree>
-      <p:nvGrpSpPr>
-        <p:cNvPr id="1" name=""/>
-        <p:cNvGrpSpPr/>
-        <p:nvPr/>
-      </p:nvGrpSpPr>
-      <p:grpSpPr/>
-      <p:sp>
-        <p:nvSpPr>
-          <p:cNvPr id="2" name="Rectangle 1"/>
-          <p:cNvSpPr/>
-          <p:nvPr/>
-        </p:nvSpPr>
-        <p:spPr>
-          <a:xfrm>
-            <a:off x="502920" y="384048"/>
-            <a:ext cx="1051560" cy="100584"/>
-          </a:xfrm>
-          <a:prstGeom prst="rect">
-            <a:avLst/>
-          </a:prstGeom>
-          <a:solidFill>
-            <a:srgbClr val="E86A17"/>
-          </a:solidFill>
-          <a:ln>
-            <a:noFill/>
-          </a:ln>
-        </p:spPr>
-        <p:style>
-          <a:lnRef idx="1">
-            <a:schemeClr val="accent1"/>
-          </a:lnRef>
-          <a:fillRef idx="3">
-            <a:schemeClr val="accent1"/>
-          </a:fillRef>
-          <a:effectRef idx="2">
-            <a:schemeClr val="accent1"/>
-          </a:effectRef>
-          <a:fontRef idx="minor">
-            <a:schemeClr val="lt1"/>
-          </a:fontRef>
-        </p:style>
-        <p:txBody>
-          <a:bodyPr rtlCol="0" anchor="ctr"/>
-          <a:lstStyle/>
-          <a:p>
-            <a:pPr algn="ctr"/>
-          </a:p>
-        </p:txBody>
-      </p:sp>
-      <p:sp>
-        <p:nvSpPr>
-          <p:cNvPr id="3" name="TextBox 2"/>
-          <p:cNvSpPr txBox="1"/>
-          <p:nvPr/>
-        </p:nvSpPr>
-        <p:spPr>
-          <a:xfrm>
-            <a:off x="502920" y="475488"/>
-            <a:ext cx="10058400" cy="731520"/>
-          </a:xfrm>
-          <a:prstGeom prst="rect">
-            <a:avLst/>
-          </a:prstGeom>
-          <a:noFill/>
-        </p:spPr>
-        <p:txBody>
-          <a:bodyPr wrap="square" anchor="t" lIns="0" rIns="0" tIns="0" bIns="0">
-            <a:spAutoFit/>
-          </a:bodyPr>
-          <a:lstStyle/>
-          <a:p>
-            <a:pPr algn="l"/>
-            <a:r>
-              <a:rPr sz="3000" b="1">
-                <a:solidFill>
-                  <a:srgbClr val="1A1A1A"/>
-                </a:solidFill>
-                <a:latin typeface="Calibri"/>
-              </a:rPr>
-              <a:t>PROFILO DI MATURITÀ</a:t>
-            </a:r>
-          </a:p>
-        </p:txBody>
-      </p:sp>
-      <p:sp>
-        <p:nvSpPr>
-          <p:cNvPr id="4" name="TextBox 3"/>
-          <p:cNvSpPr txBox="1"/>
-          <p:nvPr/>
-        </p:nvSpPr>
-        <p:spPr>
-          <a:xfrm>
-            <a:off x="502920" y="1078992"/>
-            <a:ext cx="10515600" cy="365760"/>
-          </a:xfrm>
-          <a:prstGeom prst="rect">
-            <a:avLst/>
-          </a:prstGeom>
-          <a:noFill/>
-        </p:spPr>
-        <p:txBody>
-          <a:bodyPr wrap="square" anchor="t" lIns="0" rIns="0" tIns="0" bIns="0">
-            <a:spAutoFit/>
-          </a:bodyPr>
-          <a:lstStyle/>
-          <a:p>
-            <a:pPr algn="l"/>
-            <a:r>
-              <a:rPr sz="1300" b="0">
-                <a:solidFill>
-                  <a:srgbClr val="555555"/>
-                </a:solidFill>
-                <a:latin typeface="Calibri"/>
-              </a:rPr>
-              <a:t>Distribuzione dei livelli di maturità per area</a:t>
-            </a:r>
-          </a:p>
-        </p:txBody>
-      </p:sp>
-      <p:sp>
-        <p:nvSpPr>
-          <p:cNvPr id="5" name="TextBox 4"/>
-          <p:cNvSpPr txBox="1"/>
-          <p:nvPr/>
-        </p:nvSpPr>
-        <p:spPr>
-          <a:xfrm>
-            <a:off x="640080" y="1691640"/>
-            <a:ext cx="6126480" cy="4846320"/>
-          </a:xfrm>
-          <a:prstGeom prst="rect">
-            <a:avLst/>
-          </a:prstGeom>
-          <a:noFill/>
-        </p:spPr>
-        <p:txBody>
-          <a:bodyPr wrap="square" anchor="t" lIns="0" rIns="0" tIns="0" bIns="0">
-            <a:spAutoFit/>
-          </a:bodyPr>
-          <a:lstStyle/>
-          <a:p>
-            <a:pPr algn="l"/>
-            <a:r>
-              <a:rPr sz="1200" b="0">
-                <a:solidFill>
-                  <a:srgbClr val="CCCCCC"/>
-                </a:solidFill>
-                <a:latin typeface="Calibri"/>
-              </a:rPr>
-              <a:t>{{radar.aree}}</a:t>
-            </a:r>
-          </a:p>
-        </p:txBody>
-      </p:sp>
-      <p:sp>
-        <p:nvSpPr>
-          <p:cNvPr id="6" name="TextBox 5"/>
-          <p:cNvSpPr txBox="1"/>
-          <p:nvPr/>
-        </p:nvSpPr>
-        <p:spPr>
-          <a:xfrm>
-            <a:off x="7360920" y="1783080"/>
-            <a:ext cx="4389120" cy="320040"/>
-          </a:xfrm>
-          <a:prstGeom prst="rect">
-            <a:avLst/>
-          </a:prstGeom>
-          <a:noFill/>
-        </p:spPr>
-        <p:txBody>
-          <a:bodyPr wrap="square" anchor="t" lIns="0" rIns="0" tIns="0" bIns="0">
-            <a:spAutoFit/>
-          </a:bodyPr>
-          <a:lstStyle/>
-          <a:p>
-            <a:pPr algn="l"/>
-            <a:r>
-              <a:rPr sz="1300" b="1">
-                <a:solidFill>
-                  <a:srgbClr val="1A1A1A"/>
-                </a:solidFill>
-                <a:latin typeface="Calibri"/>
-              </a:rPr>
-              <a:t>LIVELLI PER AREA</a:t>
-            </a:r>
-          </a:p>
-        </p:txBody>
-      </p:sp>
-      <p:sp>
-        <p:nvSpPr>
-          <p:cNvPr id="7" name="TextBox 6"/>
-          <p:cNvSpPr txBox="1"/>
-          <p:nvPr/>
-        </p:nvSpPr>
-        <p:spPr>
-          <a:xfrm>
-            <a:off x="7360920" y="2240280"/>
-            <a:ext cx="4389120" cy="457200"/>
-          </a:xfrm>
-          <a:prstGeom prst="rect">
-            <a:avLst/>
-          </a:prstGeom>
-          <a:noFill/>
-        </p:spPr>
-        <p:txBody>
-          <a:bodyPr wrap="square" anchor="t" lIns="0" rIns="0" tIns="0" bIns="0">
-            <a:spAutoFit/>
-          </a:bodyPr>
-          <a:lstStyle/>
-          <a:p>
-            <a:pPr algn="l"/>
-            <a:r>
-              <a:rPr sz="1300" b="1">
-                <a:solidFill>
-                  <a:srgbClr val="1A1A1A"/>
-                </a:solidFill>
-                <a:latin typeface="Calibri"/>
-              </a:rPr>
-              <a:t>STRATEGIA   </a:t>
-            </a:r>
-            <a:r>
-              <a:rPr sz="1300" b="0">
-                <a:solidFill>
-                  <a:srgbClr val="555555"/>
-                </a:solidFill>
-                <a:latin typeface="Calibri"/>
-              </a:rPr>
-              <a:t>{{strategia.risultato}}</a:t>
-            </a:r>
-          </a:p>
-        </p:txBody>
-      </p:sp>
-      <p:sp>
-        <p:nvSpPr>
-          <p:cNvPr id="8" name="TextBox 7"/>
-          <p:cNvSpPr txBox="1"/>
-          <p:nvPr/>
-        </p:nvSpPr>
-        <p:spPr>
-          <a:xfrm>
-            <a:off x="7360920" y="2770632"/>
-            <a:ext cx="4389120" cy="457200"/>
-          </a:xfrm>
-          <a:prstGeom prst="rect">
-            <a:avLst/>
-          </a:prstGeom>
-          <a:noFill/>
-        </p:spPr>
-        <p:txBody>
-          <a:bodyPr wrap="square" anchor="t" lIns="0" rIns="0" tIns="0" bIns="0">
-            <a:spAutoFit/>
-          </a:bodyPr>
-          <a:lstStyle/>
-          <a:p>
-            <a:pPr algn="l"/>
-            <a:r>
-              <a:rPr sz="1300" b="1">
-                <a:solidFill>
-                  <a:srgbClr val="1A1A1A"/>
-                </a:solidFill>
-                <a:latin typeface="Calibri"/>
-              </a:rPr>
-              <a:t>CULTURA   </a:t>
-            </a:r>
-            <a:r>
-              <a:rPr sz="1300" b="0">
-                <a:solidFill>
-                  <a:srgbClr val="555555"/>
-                </a:solidFill>
-                <a:latin typeface="Calibri"/>
-              </a:rPr>
-              <a:t>{{cultura.risultato}}</a:t>
-            </a:r>
-          </a:p>
-        </p:txBody>
-      </p:sp>
-      <p:sp>
-        <p:nvSpPr>
-          <p:cNvPr id="9" name="TextBox 8"/>
-          <p:cNvSpPr txBox="1"/>
-          <p:nvPr/>
-        </p:nvSpPr>
-        <p:spPr>
-          <a:xfrm>
-            <a:off x="7360920" y="3300984"/>
-            <a:ext cx="4389120" cy="457200"/>
-          </a:xfrm>
-          <a:prstGeom prst="rect">
-            <a:avLst/>
-          </a:prstGeom>
-          <a:noFill/>
-        </p:spPr>
-        <p:txBody>
-          <a:bodyPr wrap="square" anchor="t" lIns="0" rIns="0" tIns="0" bIns="0">
-            <a:spAutoFit/>
-          </a:bodyPr>
-          <a:lstStyle/>
-          <a:p>
-            <a:pPr algn="l"/>
-            <a:r>
-              <a:rPr sz="1300" b="1">
-                <a:solidFill>
-                  <a:srgbClr val="1A1A1A"/>
-                </a:solidFill>
-                <a:latin typeface="Calibri"/>
-              </a:rPr>
-              <a:t>PROCESSI   </a:t>
-            </a:r>
-            <a:r>
-              <a:rPr sz="1300" b="0">
-                <a:solidFill>
-                  <a:srgbClr val="555555"/>
-                </a:solidFill>
-                <a:latin typeface="Calibri"/>
-              </a:rPr>
-              <a:t>{{processi.risultato}}</a:t>
-            </a:r>
-          </a:p>
-        </p:txBody>
-      </p:sp>
-      <p:sp>
-        <p:nvSpPr>
-          <p:cNvPr id="10" name="TextBox 9"/>
-          <p:cNvSpPr txBox="1"/>
-          <p:nvPr/>
-        </p:nvSpPr>
-        <p:spPr>
-          <a:xfrm>
-            <a:off x="7360920" y="3831336"/>
-            <a:ext cx="4389120" cy="457200"/>
-          </a:xfrm>
-          <a:prstGeom prst="rect">
-            <a:avLst/>
-          </a:prstGeom>
-          <a:noFill/>
-        </p:spPr>
-        <p:txBody>
-          <a:bodyPr wrap="square" anchor="t" lIns="0" rIns="0" tIns="0" bIns="0">
-            <a:spAutoFit/>
-          </a:bodyPr>
-          <a:lstStyle/>
-          <a:p>
-            <a:pPr algn="l"/>
-            <a:r>
-              <a:rPr sz="1300" b="1">
-                <a:solidFill>
-                  <a:srgbClr val="1A1A1A"/>
-                </a:solidFill>
-                <a:latin typeface="Calibri"/>
-              </a:rPr>
-              <a:t>MERCATO   </a:t>
-            </a:r>
-            <a:r>
-              <a:rPr sz="1300" b="0">
-                <a:solidFill>
-                  <a:srgbClr val="555555"/>
-                </a:solidFill>
-                <a:latin typeface="Calibri"/>
-              </a:rPr>
-              <a:t>{{mercato.risultato}}</a:t>
-            </a:r>
-          </a:p>
-        </p:txBody>
-      </p:sp>
-      <p:sp>
-        <p:nvSpPr>
-          <p:cNvPr id="11" name="Rectangle 10"/>
-          <p:cNvSpPr/>
-          <p:nvPr/>
-        </p:nvSpPr>
-        <p:spPr>
-          <a:xfrm>
-            <a:off x="7360920" y="4407408"/>
-            <a:ext cx="4251960" cy="9525"/>
-          </a:xfrm>
-          <a:prstGeom prst="rect">
-            <a:avLst/>
-          </a:prstGeom>
-          <a:solidFill>
-            <a:srgbClr val="CCCCCC"/>
-          </a:solidFill>
-          <a:ln>
-            <a:noFill/>
-          </a:ln>
-        </p:spPr>
-        <p:style>
-          <a:lnRef idx="1">
-            <a:schemeClr val="accent1"/>
-          </a:lnRef>
-          <a:fillRef idx="3">
-            <a:schemeClr val="accent1"/>
-          </a:fillRef>
-          <a:effectRef idx="2">
-            <a:schemeClr val="accent1"/>
-          </a:effectRef>
-          <a:fontRef idx="minor">
-            <a:schemeClr val="lt1"/>
-          </a:fontRef>
-        </p:style>
-        <p:txBody>
-          <a:bodyPr rtlCol="0" anchor="ctr"/>
-          <a:lstStyle/>
-          <a:p>
-            <a:pPr algn="ctr"/>
-          </a:p>
-        </p:txBody>
-      </p:sp>
-      <p:sp>
-        <p:nvSpPr>
-          <p:cNvPr id="12" name="TextBox 11"/>
-          <p:cNvSpPr txBox="1"/>
-          <p:nvPr/>
-        </p:nvSpPr>
-        <p:spPr>
-          <a:xfrm>
-            <a:off x="7360920" y="4562856"/>
-            <a:ext cx="4389120" cy="320040"/>
-          </a:xfrm>
-          <a:prstGeom prst="rect">
-            <a:avLst/>
-          </a:prstGeom>
-          <a:noFill/>
-        </p:spPr>
-        <p:txBody>
-          <a:bodyPr wrap="square" anchor="t" lIns="0" rIns="0" tIns="0" bIns="0">
-            <a:spAutoFit/>
-          </a:bodyPr>
-          <a:lstStyle/>
-          <a:p>
-            <a:pPr algn="l"/>
-            <a:r>
-              <a:rPr sz="1300" b="1">
-                <a:solidFill>
-                  <a:srgbClr val="1A1A1A"/>
-                </a:solidFill>
-                <a:latin typeface="Calibri"/>
-              </a:rPr>
-              <a:t>LIVELLO MACRO</a:t>
-            </a:r>
-          </a:p>
-        </p:txBody>
-      </p:sp>
-      <p:sp>
-        <p:nvSpPr>
-          <p:cNvPr id="13" name="TextBox 12"/>
-          <p:cNvSpPr txBox="1"/>
-          <p:nvPr/>
-        </p:nvSpPr>
-        <p:spPr>
-          <a:xfrm>
-            <a:off x="7360920" y="4928616"/>
-            <a:ext cx="4389120" cy="457200"/>
-          </a:xfrm>
-          <a:prstGeom prst="rect">
-            <a:avLst/>
-          </a:prstGeom>
-          <a:noFill/>
-        </p:spPr>
-        <p:txBody>
-          <a:bodyPr wrap="square" anchor="t" lIns="0" rIns="0" tIns="0" bIns="0">
-            <a:spAutoFit/>
-          </a:bodyPr>
-          <a:lstStyle/>
-          <a:p>
-            <a:pPr algn="l"/>
-            <a:r>
-              <a:rPr sz="1700" b="1">
-                <a:solidFill>
-                  <a:srgbClr val="E86A17"/>
-                </a:solidFill>
-                <a:latin typeface="Calibri"/>
-              </a:rPr>
-              <a:t>{{panoramica.risultato}}</a:t>
+              <a:t>{{panoramica.descrizione}}</a:t>
             </a:r>
           </a:p>
         </p:txBody>

--- a/mod1/template_esempio.pptx
+++ b/mod1/template_esempio.pptx
@@ -11,6 +11,10 @@
     <p:sldId id="259" r:id="rId10"/>
     <p:sldId id="260" r:id="rId11"/>
     <p:sldId id="261" r:id="rId12"/>
+    <p:sldId id="262" r:id="rId13"/>
+    <p:sldId id="263" r:id="rId14"/>
+    <p:sldId id="264" r:id="rId15"/>
+    <p:sldId id="265" r:id="rId16"/>
   </p:sldIdLst>
   <p:sldSz cx="12191695" cy="6858000" type="screen4x3"/>
   <p:notesSz cx="6858000" cy="9144000"/>
@@ -3744,6 +3748,172 @@
 </p:sld>
 </file>
 
+<file path=ppt/slides/slide10.xml><?xml version="1.0" encoding="utf-8"?>
+<p:sld xmlns:a="http://schemas.openxmlformats.org/drawingml/2006/main" xmlns:p="http://schemas.openxmlformats.org/presentationml/2006/main" xmlns:r="http://schemas.openxmlformats.org/officeDocument/2006/relationships">
+  <p:cSld>
+    <p:spTree>
+      <p:nvGrpSpPr>
+        <p:cNvPr id="1" name=""/>
+        <p:cNvGrpSpPr/>
+        <p:nvPr/>
+      </p:nvGrpSpPr>
+      <p:grpSpPr/>
+      <p:sp>
+        <p:nvSpPr>
+          <p:cNvPr id="2" name="Rectangle 1"/>
+          <p:cNvSpPr/>
+          <p:nvPr/>
+        </p:nvSpPr>
+        <p:spPr>
+          <a:xfrm>
+            <a:off x="502920" y="384048"/>
+            <a:ext cx="1051560" cy="100584"/>
+          </a:xfrm>
+          <a:prstGeom prst="rect">
+            <a:avLst/>
+          </a:prstGeom>
+          <a:solidFill>
+            <a:srgbClr val="E86A17"/>
+          </a:solidFill>
+          <a:ln>
+            <a:noFill/>
+          </a:ln>
+        </p:spPr>
+        <p:style>
+          <a:lnRef idx="1">
+            <a:schemeClr val="accent1"/>
+          </a:lnRef>
+          <a:fillRef idx="3">
+            <a:schemeClr val="accent1"/>
+          </a:fillRef>
+          <a:effectRef idx="2">
+            <a:schemeClr val="accent1"/>
+          </a:effectRef>
+          <a:fontRef idx="minor">
+            <a:schemeClr val="lt1"/>
+          </a:fontRef>
+        </p:style>
+        <p:txBody>
+          <a:bodyPr rtlCol="0" anchor="ctr"/>
+          <a:lstStyle/>
+          <a:p>
+            <a:pPr algn="ctr"/>
+          </a:p>
+        </p:txBody>
+      </p:sp>
+      <p:sp>
+        <p:nvSpPr>
+          <p:cNvPr id="3" name="TextBox 2"/>
+          <p:cNvSpPr txBox="1"/>
+          <p:nvPr/>
+        </p:nvSpPr>
+        <p:spPr>
+          <a:xfrm>
+            <a:off x="502920" y="475488"/>
+            <a:ext cx="10515600" cy="731520"/>
+          </a:xfrm>
+          <a:prstGeom prst="rect">
+            <a:avLst/>
+          </a:prstGeom>
+          <a:noFill/>
+        </p:spPr>
+        <p:txBody>
+          <a:bodyPr wrap="square" anchor="t" lIns="0" rIns="0" tIns="0" bIns="0">
+            <a:spAutoFit/>
+          </a:bodyPr>
+          <a:lstStyle/>
+          <a:p>
+            <a:pPr algn="l"/>
+            <a:r>
+              <a:rPr sz="3000" b="1">
+                <a:solidFill>
+                  <a:srgbClr val="1A1A1A"/>
+                </a:solidFill>
+                <a:latin typeface="Calibri"/>
+              </a:rPr>
+              <a:t>DESCRIZIONI PER PUNTEGGIO (2/2)</a:t>
+            </a:r>
+          </a:p>
+        </p:txBody>
+      </p:sp>
+      <p:sp>
+        <p:nvSpPr>
+          <p:cNvPr id="4" name="TextBox 3"/>
+          <p:cNvSpPr txBox="1"/>
+          <p:nvPr/>
+        </p:nvSpPr>
+        <p:spPr>
+          <a:xfrm>
+            <a:off x="502920" y="1078992"/>
+            <a:ext cx="10515600" cy="365760"/>
+          </a:xfrm>
+          <a:prstGeom prst="rect">
+            <a:avLst/>
+          </a:prstGeom>
+          <a:noFill/>
+        </p:spPr>
+        <p:txBody>
+          <a:bodyPr wrap="square" anchor="t" lIns="0" rIns="0" tIns="0" bIns="0">
+            <a:spAutoFit/>
+          </a:bodyPr>
+          <a:lstStyle/>
+          <a:p>
+            <a:pPr algn="l"/>
+            <a:r>
+              <a:rPr sz="1300" b="0">
+                <a:solidFill>
+                  <a:srgbClr val="555555"/>
+                </a:solidFill>
+                <a:latin typeface="Calibri"/>
+              </a:rPr>
+              <a:t>Testo di riferimento del punteggio comunicato (asse Y), 5 temi per slide</a:t>
+            </a:r>
+          </a:p>
+        </p:txBody>
+      </p:sp>
+      <p:sp>
+        <p:nvSpPr>
+          <p:cNvPr id="5" name="TextBox 4"/>
+          <p:cNvSpPr txBox="1"/>
+          <p:nvPr/>
+        </p:nvSpPr>
+        <p:spPr>
+          <a:xfrm>
+            <a:off x="502920" y="1554480"/>
+            <a:ext cx="11201400" cy="4846320"/>
+          </a:xfrm>
+          <a:prstGeom prst="rect">
+            <a:avLst/>
+          </a:prstGeom>
+          <a:noFill/>
+        </p:spPr>
+        <p:txBody>
+          <a:bodyPr wrap="square" anchor="t" lIns="0" rIns="0" tIns="0" bIns="0">
+            <a:spAutoFit/>
+          </a:bodyPr>
+          <a:lstStyle/>
+          <a:p>
+            <a:pPr algn="l"/>
+            <a:r>
+              <a:rPr sz="1200" b="0">
+                <a:solidFill>
+                  <a:srgbClr val="CCCCCC"/>
+                </a:solidFill>
+                <a:latin typeface="Calibri"/>
+              </a:rPr>
+              <a:t>{{descrizioni.tabella2}}</a:t>
+            </a:r>
+          </a:p>
+        </p:txBody>
+      </p:sp>
+    </p:spTree>
+  </p:cSld>
+  <p:clrMapOvr>
+    <a:masterClrMapping/>
+  </p:clrMapOvr>
+</p:sld>
+</file>
+
 <file path=ppt/slides/slide2.xml><?xml version="1.0" encoding="utf-8"?>
 <p:sld xmlns:a="http://schemas.openxmlformats.org/drawingml/2006/main" xmlns:p="http://schemas.openxmlformats.org/presentationml/2006/main" xmlns:r="http://schemas.openxmlformats.org/officeDocument/2006/relationships">
   <p:cSld>
@@ -7476,6 +7646,644 @@
                 <a:latin typeface="Calibri"/>
               </a:rPr>
               <a:t>{{panoramica.descrizione}}</a:t>
+            </a:r>
+          </a:p>
+        </p:txBody>
+      </p:sp>
+    </p:spTree>
+  </p:cSld>
+  <p:clrMapOvr>
+    <a:masterClrMapping/>
+  </p:clrMapOvr>
+</p:sld>
+</file>
+
+<file path=ppt/slides/slide7.xml><?xml version="1.0" encoding="utf-8"?>
+<p:sld xmlns:a="http://schemas.openxmlformats.org/drawingml/2006/main" xmlns:p="http://schemas.openxmlformats.org/presentationml/2006/main" xmlns:r="http://schemas.openxmlformats.org/officeDocument/2006/relationships">
+  <p:cSld>
+    <p:spTree>
+      <p:nvGrpSpPr>
+        <p:cNvPr id="1" name=""/>
+        <p:cNvGrpSpPr/>
+        <p:nvPr/>
+      </p:nvGrpSpPr>
+      <p:grpSpPr/>
+      <p:sp>
+        <p:nvSpPr>
+          <p:cNvPr id="2" name="Rectangle 1"/>
+          <p:cNvSpPr/>
+          <p:nvPr/>
+        </p:nvSpPr>
+        <p:spPr>
+          <a:xfrm>
+            <a:off x="502920" y="384048"/>
+            <a:ext cx="1051560" cy="100584"/>
+          </a:xfrm>
+          <a:prstGeom prst="rect">
+            <a:avLst/>
+          </a:prstGeom>
+          <a:solidFill>
+            <a:srgbClr val="E86A17"/>
+          </a:solidFill>
+          <a:ln>
+            <a:noFill/>
+          </a:ln>
+        </p:spPr>
+        <p:style>
+          <a:lnRef idx="1">
+            <a:schemeClr val="accent1"/>
+          </a:lnRef>
+          <a:fillRef idx="3">
+            <a:schemeClr val="accent1"/>
+          </a:fillRef>
+          <a:effectRef idx="2">
+            <a:schemeClr val="accent1"/>
+          </a:effectRef>
+          <a:fontRef idx="minor">
+            <a:schemeClr val="lt1"/>
+          </a:fontRef>
+        </p:style>
+        <p:txBody>
+          <a:bodyPr rtlCol="0" anchor="ctr"/>
+          <a:lstStyle/>
+          <a:p>
+            <a:pPr algn="ctr"/>
+          </a:p>
+        </p:txBody>
+      </p:sp>
+      <p:sp>
+        <p:nvSpPr>
+          <p:cNvPr id="3" name="TextBox 2"/>
+          <p:cNvSpPr txBox="1"/>
+          <p:nvPr/>
+        </p:nvSpPr>
+        <p:spPr>
+          <a:xfrm>
+            <a:off x="502920" y="475488"/>
+            <a:ext cx="10515600" cy="731520"/>
+          </a:xfrm>
+          <a:prstGeom prst="rect">
+            <a:avLst/>
+          </a:prstGeom>
+          <a:noFill/>
+        </p:spPr>
+        <p:txBody>
+          <a:bodyPr wrap="square" anchor="t" lIns="0" rIns="0" tIns="0" bIns="0">
+            <a:spAutoFit/>
+          </a:bodyPr>
+          <a:lstStyle/>
+          <a:p>
+            <a:pPr algn="l"/>
+            <a:r>
+              <a:rPr sz="3000" b="1">
+                <a:solidFill>
+                  <a:srgbClr val="1A1A1A"/>
+                </a:solidFill>
+                <a:latin typeface="Calibri"/>
+              </a:rPr>
+              <a:t>PROFILO RADAR ESTERNO</a:t>
+            </a:r>
+          </a:p>
+        </p:txBody>
+      </p:sp>
+      <p:sp>
+        <p:nvSpPr>
+          <p:cNvPr id="4" name="TextBox 3"/>
+          <p:cNvSpPr txBox="1"/>
+          <p:nvPr/>
+        </p:nvSpPr>
+        <p:spPr>
+          <a:xfrm>
+            <a:off x="502920" y="1078992"/>
+            <a:ext cx="10515600" cy="365760"/>
+          </a:xfrm>
+          <a:prstGeom prst="rect">
+            <a:avLst/>
+          </a:prstGeom>
+          <a:noFill/>
+        </p:spPr>
+        <p:txBody>
+          <a:bodyPr wrap="square" anchor="t" lIns="0" rIns="0" tIns="0" bIns="0">
+            <a:spAutoFit/>
+          </a:bodyPr>
+          <a:lstStyle/>
+          <a:p>
+            <a:pPr algn="l"/>
+            <a:r>
+              <a:rPr sz="1300" b="0">
+                <a:solidFill>
+                  <a:srgbClr val="555555"/>
+                </a:solidFill>
+                <a:latin typeface="Calibri"/>
+              </a:rPr>
+              <a:t>Punteggi di reporting e delle dimensioni DEIA: azienda vs media dei concorrenti</a:t>
+            </a:r>
+          </a:p>
+        </p:txBody>
+      </p:sp>
+      <p:sp>
+        <p:nvSpPr>
+          <p:cNvPr id="5" name="TextBox 4"/>
+          <p:cNvSpPr txBox="1"/>
+          <p:nvPr/>
+        </p:nvSpPr>
+        <p:spPr>
+          <a:xfrm>
+            <a:off x="502920" y="1508760"/>
+            <a:ext cx="5394960" cy="2514600"/>
+          </a:xfrm>
+          <a:prstGeom prst="rect">
+            <a:avLst/>
+          </a:prstGeom>
+          <a:noFill/>
+        </p:spPr>
+        <p:txBody>
+          <a:bodyPr wrap="square" anchor="t" lIns="0" rIns="0" tIns="0" bIns="0">
+            <a:spAutoFit/>
+          </a:bodyPr>
+          <a:lstStyle/>
+          <a:p>
+            <a:pPr algn="l"/>
+            <a:r>
+              <a:rPr sz="1200" b="0">
+                <a:solidFill>
+                  <a:srgbClr val="CCCCCC"/>
+                </a:solidFill>
+                <a:latin typeface="Calibri"/>
+              </a:rPr>
+              <a:t>{{radar_reporting.azienda}}</a:t>
+            </a:r>
+          </a:p>
+        </p:txBody>
+      </p:sp>
+      <p:sp>
+        <p:nvSpPr>
+          <p:cNvPr id="6" name="TextBox 5"/>
+          <p:cNvSpPr txBox="1"/>
+          <p:nvPr/>
+        </p:nvSpPr>
+        <p:spPr>
+          <a:xfrm>
+            <a:off x="6172200" y="1508760"/>
+            <a:ext cx="5394960" cy="2514600"/>
+          </a:xfrm>
+          <a:prstGeom prst="rect">
+            <a:avLst/>
+          </a:prstGeom>
+          <a:noFill/>
+        </p:spPr>
+        <p:txBody>
+          <a:bodyPr wrap="square" anchor="t" lIns="0" rIns="0" tIns="0" bIns="0">
+            <a:spAutoFit/>
+          </a:bodyPr>
+          <a:lstStyle/>
+          <a:p>
+            <a:pPr algn="l"/>
+            <a:r>
+              <a:rPr sz="1200" b="0">
+                <a:solidFill>
+                  <a:srgbClr val="CCCCCC"/>
+                </a:solidFill>
+                <a:latin typeface="Calibri"/>
+              </a:rPr>
+              <a:t>{{radar_diversita.azienda}}</a:t>
+            </a:r>
+          </a:p>
+        </p:txBody>
+      </p:sp>
+      <p:sp>
+        <p:nvSpPr>
+          <p:cNvPr id="7" name="TextBox 6"/>
+          <p:cNvSpPr txBox="1"/>
+          <p:nvPr/>
+        </p:nvSpPr>
+        <p:spPr>
+          <a:xfrm>
+            <a:off x="502920" y="4206240"/>
+            <a:ext cx="5394960" cy="2514600"/>
+          </a:xfrm>
+          <a:prstGeom prst="rect">
+            <a:avLst/>
+          </a:prstGeom>
+          <a:noFill/>
+        </p:spPr>
+        <p:txBody>
+          <a:bodyPr wrap="square" anchor="t" lIns="0" rIns="0" tIns="0" bIns="0">
+            <a:spAutoFit/>
+          </a:bodyPr>
+          <a:lstStyle/>
+          <a:p>
+            <a:pPr algn="l"/>
+            <a:r>
+              <a:rPr sz="1200" b="0">
+                <a:solidFill>
+                  <a:srgbClr val="CCCCCC"/>
+                </a:solidFill>
+                <a:latin typeface="Calibri"/>
+              </a:rPr>
+              <a:t>{{radar_reporting.settore}}</a:t>
+            </a:r>
+          </a:p>
+        </p:txBody>
+      </p:sp>
+      <p:sp>
+        <p:nvSpPr>
+          <p:cNvPr id="8" name="TextBox 7"/>
+          <p:cNvSpPr txBox="1"/>
+          <p:nvPr/>
+        </p:nvSpPr>
+        <p:spPr>
+          <a:xfrm>
+            <a:off x="6172200" y="4206240"/>
+            <a:ext cx="5394960" cy="2514600"/>
+          </a:xfrm>
+          <a:prstGeom prst="rect">
+            <a:avLst/>
+          </a:prstGeom>
+          <a:noFill/>
+        </p:spPr>
+        <p:txBody>
+          <a:bodyPr wrap="square" anchor="t" lIns="0" rIns="0" tIns="0" bIns="0">
+            <a:spAutoFit/>
+          </a:bodyPr>
+          <a:lstStyle/>
+          <a:p>
+            <a:pPr algn="l"/>
+            <a:r>
+              <a:rPr sz="1200" b="0">
+                <a:solidFill>
+                  <a:srgbClr val="CCCCCC"/>
+                </a:solidFill>
+                <a:latin typeface="Calibri"/>
+              </a:rPr>
+              <a:t>{{radar_diversita.settore}}</a:t>
+            </a:r>
+          </a:p>
+        </p:txBody>
+      </p:sp>
+    </p:spTree>
+  </p:cSld>
+  <p:clrMapOvr>
+    <a:masterClrMapping/>
+  </p:clrMapOvr>
+</p:sld>
+</file>
+
+<file path=ppt/slides/slide8.xml><?xml version="1.0" encoding="utf-8"?>
+<p:sld xmlns:a="http://schemas.openxmlformats.org/drawingml/2006/main" xmlns:p="http://schemas.openxmlformats.org/presentationml/2006/main" xmlns:r="http://schemas.openxmlformats.org/officeDocument/2006/relationships">
+  <p:cSld>
+    <p:spTree>
+      <p:nvGrpSpPr>
+        <p:cNvPr id="1" name=""/>
+        <p:cNvGrpSpPr/>
+        <p:nvPr/>
+      </p:nvGrpSpPr>
+      <p:grpSpPr/>
+      <p:sp>
+        <p:nvSpPr>
+          <p:cNvPr id="2" name="Rectangle 1"/>
+          <p:cNvSpPr/>
+          <p:nvPr/>
+        </p:nvSpPr>
+        <p:spPr>
+          <a:xfrm>
+            <a:off x="502920" y="384048"/>
+            <a:ext cx="1051560" cy="100584"/>
+          </a:xfrm>
+          <a:prstGeom prst="rect">
+            <a:avLst/>
+          </a:prstGeom>
+          <a:solidFill>
+            <a:srgbClr val="E86A17"/>
+          </a:solidFill>
+          <a:ln>
+            <a:noFill/>
+          </a:ln>
+        </p:spPr>
+        <p:style>
+          <a:lnRef idx="1">
+            <a:schemeClr val="accent1"/>
+          </a:lnRef>
+          <a:fillRef idx="3">
+            <a:schemeClr val="accent1"/>
+          </a:fillRef>
+          <a:effectRef idx="2">
+            <a:schemeClr val="accent1"/>
+          </a:effectRef>
+          <a:fontRef idx="minor">
+            <a:schemeClr val="lt1"/>
+          </a:fontRef>
+        </p:style>
+        <p:txBody>
+          <a:bodyPr rtlCol="0" anchor="ctr"/>
+          <a:lstStyle/>
+          <a:p>
+            <a:pPr algn="ctr"/>
+          </a:p>
+        </p:txBody>
+      </p:sp>
+      <p:sp>
+        <p:nvSpPr>
+          <p:cNvPr id="3" name="TextBox 2"/>
+          <p:cNvSpPr txBox="1"/>
+          <p:nvPr/>
+        </p:nvSpPr>
+        <p:spPr>
+          <a:xfrm>
+            <a:off x="502920" y="475488"/>
+            <a:ext cx="10515600" cy="731520"/>
+          </a:xfrm>
+          <a:prstGeom prst="rect">
+            <a:avLst/>
+          </a:prstGeom>
+          <a:noFill/>
+        </p:spPr>
+        <p:txBody>
+          <a:bodyPr wrap="square" anchor="t" lIns="0" rIns="0" tIns="0" bIns="0">
+            <a:spAutoFit/>
+          </a:bodyPr>
+          <a:lstStyle/>
+          <a:p>
+            <a:pPr algn="l"/>
+            <a:r>
+              <a:rPr sz="3000" b="1">
+                <a:solidFill>
+                  <a:srgbClr val="1A1A1A"/>
+                </a:solidFill>
+                <a:latin typeface="Calibri"/>
+              </a:rPr>
+              <a:t>MATRICE DI TRASPARENZA</a:t>
+            </a:r>
+          </a:p>
+        </p:txBody>
+      </p:sp>
+      <p:sp>
+        <p:nvSpPr>
+          <p:cNvPr id="4" name="TextBox 3"/>
+          <p:cNvSpPr txBox="1"/>
+          <p:nvPr/>
+        </p:nvSpPr>
+        <p:spPr>
+          <a:xfrm>
+            <a:off x="502920" y="1078992"/>
+            <a:ext cx="10515600" cy="365760"/>
+          </a:xfrm>
+          <a:prstGeom prst="rect">
+            <a:avLst/>
+          </a:prstGeom>
+          <a:noFill/>
+        </p:spPr>
+        <p:txBody>
+          <a:bodyPr wrap="square" anchor="t" lIns="0" rIns="0" tIns="0" bIns="0">
+            <a:spAutoFit/>
+          </a:bodyPr>
+          <a:lstStyle/>
+          <a:p>
+            <a:pPr algn="l"/>
+            <a:r>
+              <a:rPr sz="1300" b="0">
+                <a:solidFill>
+                  <a:srgbClr val="555555"/>
+                </a:solidFill>
+                <a:latin typeface="Calibri"/>
+              </a:rPr>
+              <a:t>Maturità praticata (survey) vs comunicata (reporting) sui 10 temi</a:t>
+            </a:r>
+          </a:p>
+        </p:txBody>
+      </p:sp>
+      <p:sp>
+        <p:nvSpPr>
+          <p:cNvPr id="5" name="TextBox 4"/>
+          <p:cNvSpPr txBox="1"/>
+          <p:nvPr/>
+        </p:nvSpPr>
+        <p:spPr>
+          <a:xfrm>
+            <a:off x="502920" y="1554480"/>
+            <a:ext cx="5212080" cy="4846320"/>
+          </a:xfrm>
+          <a:prstGeom prst="rect">
+            <a:avLst/>
+          </a:prstGeom>
+          <a:noFill/>
+        </p:spPr>
+        <p:txBody>
+          <a:bodyPr wrap="square" anchor="t" lIns="0" rIns="0" tIns="0" bIns="0">
+            <a:spAutoFit/>
+          </a:bodyPr>
+          <a:lstStyle/>
+          <a:p>
+            <a:pPr algn="l"/>
+            <a:r>
+              <a:rPr sz="1200" b="0">
+                <a:solidFill>
+                  <a:srgbClr val="CCCCCC"/>
+                </a:solidFill>
+                <a:latin typeface="Calibri"/>
+              </a:rPr>
+              <a:t>{{matrice.tabella}}</a:t>
+            </a:r>
+          </a:p>
+        </p:txBody>
+      </p:sp>
+      <p:sp>
+        <p:nvSpPr>
+          <p:cNvPr id="6" name="TextBox 5"/>
+          <p:cNvSpPr txBox="1"/>
+          <p:nvPr/>
+        </p:nvSpPr>
+        <p:spPr>
+          <a:xfrm>
+            <a:off x="5989320" y="1554480"/>
+            <a:ext cx="5715000" cy="4846320"/>
+          </a:xfrm>
+          <a:prstGeom prst="rect">
+            <a:avLst/>
+          </a:prstGeom>
+          <a:noFill/>
+        </p:spPr>
+        <p:txBody>
+          <a:bodyPr wrap="square" anchor="t" lIns="0" rIns="0" tIns="0" bIns="0">
+            <a:spAutoFit/>
+          </a:bodyPr>
+          <a:lstStyle/>
+          <a:p>
+            <a:pPr algn="l"/>
+            <a:r>
+              <a:rPr sz="1200" b="0">
+                <a:solidFill>
+                  <a:srgbClr val="CCCCCC"/>
+                </a:solidFill>
+                <a:latin typeface="Calibri"/>
+              </a:rPr>
+              <a:t>{{matrice.grafico}}</a:t>
+            </a:r>
+          </a:p>
+        </p:txBody>
+      </p:sp>
+    </p:spTree>
+  </p:cSld>
+  <p:clrMapOvr>
+    <a:masterClrMapping/>
+  </p:clrMapOvr>
+</p:sld>
+</file>
+
+<file path=ppt/slides/slide9.xml><?xml version="1.0" encoding="utf-8"?>
+<p:sld xmlns:a="http://schemas.openxmlformats.org/drawingml/2006/main" xmlns:p="http://schemas.openxmlformats.org/presentationml/2006/main" xmlns:r="http://schemas.openxmlformats.org/officeDocument/2006/relationships">
+  <p:cSld>
+    <p:spTree>
+      <p:nvGrpSpPr>
+        <p:cNvPr id="1" name=""/>
+        <p:cNvGrpSpPr/>
+        <p:nvPr/>
+      </p:nvGrpSpPr>
+      <p:grpSpPr/>
+      <p:sp>
+        <p:nvSpPr>
+          <p:cNvPr id="2" name="Rectangle 1"/>
+          <p:cNvSpPr/>
+          <p:nvPr/>
+        </p:nvSpPr>
+        <p:spPr>
+          <a:xfrm>
+            <a:off x="502920" y="384048"/>
+            <a:ext cx="1051560" cy="100584"/>
+          </a:xfrm>
+          <a:prstGeom prst="rect">
+            <a:avLst/>
+          </a:prstGeom>
+          <a:solidFill>
+            <a:srgbClr val="E86A17"/>
+          </a:solidFill>
+          <a:ln>
+            <a:noFill/>
+          </a:ln>
+        </p:spPr>
+        <p:style>
+          <a:lnRef idx="1">
+            <a:schemeClr val="accent1"/>
+          </a:lnRef>
+          <a:fillRef idx="3">
+            <a:schemeClr val="accent1"/>
+          </a:fillRef>
+          <a:effectRef idx="2">
+            <a:schemeClr val="accent1"/>
+          </a:effectRef>
+          <a:fontRef idx="minor">
+            <a:schemeClr val="lt1"/>
+          </a:fontRef>
+        </p:style>
+        <p:txBody>
+          <a:bodyPr rtlCol="0" anchor="ctr"/>
+          <a:lstStyle/>
+          <a:p>
+            <a:pPr algn="ctr"/>
+          </a:p>
+        </p:txBody>
+      </p:sp>
+      <p:sp>
+        <p:nvSpPr>
+          <p:cNvPr id="3" name="TextBox 2"/>
+          <p:cNvSpPr txBox="1"/>
+          <p:nvPr/>
+        </p:nvSpPr>
+        <p:spPr>
+          <a:xfrm>
+            <a:off x="502920" y="475488"/>
+            <a:ext cx="10515600" cy="731520"/>
+          </a:xfrm>
+          <a:prstGeom prst="rect">
+            <a:avLst/>
+          </a:prstGeom>
+          <a:noFill/>
+        </p:spPr>
+        <p:txBody>
+          <a:bodyPr wrap="square" anchor="t" lIns="0" rIns="0" tIns="0" bIns="0">
+            <a:spAutoFit/>
+          </a:bodyPr>
+          <a:lstStyle/>
+          <a:p>
+            <a:pPr algn="l"/>
+            <a:r>
+              <a:rPr sz="3000" b="1">
+                <a:solidFill>
+                  <a:srgbClr val="1A1A1A"/>
+                </a:solidFill>
+                <a:latin typeface="Calibri"/>
+              </a:rPr>
+              <a:t>DESCRIZIONI PER PUNTEGGIO (1/2)</a:t>
+            </a:r>
+          </a:p>
+        </p:txBody>
+      </p:sp>
+      <p:sp>
+        <p:nvSpPr>
+          <p:cNvPr id="4" name="TextBox 3"/>
+          <p:cNvSpPr txBox="1"/>
+          <p:nvPr/>
+        </p:nvSpPr>
+        <p:spPr>
+          <a:xfrm>
+            <a:off x="502920" y="1078992"/>
+            <a:ext cx="10515600" cy="365760"/>
+          </a:xfrm>
+          <a:prstGeom prst="rect">
+            <a:avLst/>
+          </a:prstGeom>
+          <a:noFill/>
+        </p:spPr>
+        <p:txBody>
+          <a:bodyPr wrap="square" anchor="t" lIns="0" rIns="0" tIns="0" bIns="0">
+            <a:spAutoFit/>
+          </a:bodyPr>
+          <a:lstStyle/>
+          <a:p>
+            <a:pPr algn="l"/>
+            <a:r>
+              <a:rPr sz="1300" b="0">
+                <a:solidFill>
+                  <a:srgbClr val="555555"/>
+                </a:solidFill>
+                <a:latin typeface="Calibri"/>
+              </a:rPr>
+              <a:t>Testo di riferimento del punteggio comunicato (asse Y), 5 temi per slide</a:t>
+            </a:r>
+          </a:p>
+        </p:txBody>
+      </p:sp>
+      <p:sp>
+        <p:nvSpPr>
+          <p:cNvPr id="5" name="TextBox 4"/>
+          <p:cNvSpPr txBox="1"/>
+          <p:nvPr/>
+        </p:nvSpPr>
+        <p:spPr>
+          <a:xfrm>
+            <a:off x="502920" y="1554480"/>
+            <a:ext cx="11201400" cy="4846320"/>
+          </a:xfrm>
+          <a:prstGeom prst="rect">
+            <a:avLst/>
+          </a:prstGeom>
+          <a:noFill/>
+        </p:spPr>
+        <p:txBody>
+          <a:bodyPr wrap="square" anchor="t" lIns="0" rIns="0" tIns="0" bIns="0">
+            <a:spAutoFit/>
+          </a:bodyPr>
+          <a:lstStyle/>
+          <a:p>
+            <a:pPr algn="l"/>
+            <a:r>
+              <a:rPr sz="1200" b="0">
+                <a:solidFill>
+                  <a:srgbClr val="CCCCCC"/>
+                </a:solidFill>
+                <a:latin typeface="Calibri"/>
+              </a:rPr>
+              <a:t>{{descrizioni.tabella1}}</a:t>
             </a:r>
           </a:p>
         </p:txBody>
